--- a/Food-Delivery.pptx
+++ b/Food-Delivery.pptx
@@ -5,7 +5,7 @@
     <p:sldMasterId id="2147483691" r:id="rId1"/>
   </p:sldMasterIdLst>
   <p:notesMasterIdLst>
-    <p:notesMasterId r:id="rId9"/>
+    <p:notesMasterId r:id="rId10"/>
   </p:notesMasterIdLst>
   <p:sldIdLst>
     <p:sldId id="256" r:id="rId2"/>
@@ -13,32 +13,33 @@
     <p:sldId id="266" r:id="rId4"/>
     <p:sldId id="298" r:id="rId5"/>
     <p:sldId id="288" r:id="rId6"/>
-    <p:sldId id="306" r:id="rId7"/>
-    <p:sldId id="351" r:id="rId8"/>
+    <p:sldId id="352" r:id="rId7"/>
+    <p:sldId id="306" r:id="rId8"/>
+    <p:sldId id="351" r:id="rId9"/>
   </p:sldIdLst>
   <p:sldSz cx="9144000" cy="5143500" type="screen16x9"/>
   <p:notesSz cx="6858000" cy="9144000"/>
   <p:embeddedFontLst>
     <p:embeddedFont>
       <p:font typeface="Advent Pro" panose="020B0604020202020204" charset="0"/>
-      <p:regular r:id="rId10"/>
-      <p:bold r:id="rId11"/>
-      <p:italic r:id="rId12"/>
-      <p:boldItalic r:id="rId13"/>
+      <p:regular r:id="rId11"/>
+      <p:bold r:id="rId12"/>
+      <p:italic r:id="rId13"/>
+      <p:boldItalic r:id="rId14"/>
     </p:embeddedFont>
     <p:embeddedFont>
-      <p:font typeface="Roboto" panose="020B0604020202020204" charset="0"/>
-      <p:regular r:id="rId14"/>
-      <p:bold r:id="rId15"/>
-      <p:italic r:id="rId16"/>
-      <p:boldItalic r:id="rId17"/>
+      <p:font typeface="Open Sans" panose="020B0606030504020204" pitchFamily="34" charset="0"/>
+      <p:regular r:id="rId15"/>
+      <p:bold r:id="rId16"/>
+      <p:italic r:id="rId17"/>
+      <p:boldItalic r:id="rId18"/>
     </p:embeddedFont>
     <p:embeddedFont>
-      <p:font typeface="Open Sans" panose="020B0604020202020204" charset="0"/>
-      <p:regular r:id="rId18"/>
-      <p:bold r:id="rId19"/>
-      <p:italic r:id="rId20"/>
-      <p:boldItalic r:id="rId21"/>
+      <p:font typeface="Roboto" panose="02000000000000000000" pitchFamily="2" charset="0"/>
+      <p:regular r:id="rId19"/>
+      <p:bold r:id="rId20"/>
+      <p:italic r:id="rId21"/>
+      <p:boldItalic r:id="rId22"/>
     </p:embeddedFont>
   </p:embeddedFontLst>
   <p:defaultTextStyle>
@@ -280,6 +281,7 @@
             <p14:sldId id="266"/>
             <p14:sldId id="298"/>
             <p14:sldId id="288"/>
+            <p14:sldId id="352"/>
             <p14:sldId id="306"/>
             <p14:sldId id="351"/>
           </p14:sldIdLst>
@@ -919,7 +921,7 @@
             </a:br>
             <a:r>
               <a:rPr lang="fr-FR" dirty="0"/>
-              <a:t>Ce projet a été réalisé dans le cadre de notre PFA par moi </a:t>
+              <a:t>Ce projet a été réalisé dans le cadre de notre PFE par moi </a:t>
             </a:r>
             <a:r>
               <a:rPr lang="fr-FR" dirty="0" err="1"/>
@@ -943,15 +945,7 @@
             </a:r>
             <a:r>
               <a:rPr lang="fr-FR" dirty="0"/>
-              <a:t>, </a:t>
-            </a:r>
-            <a:r>
-              <a:rPr lang="fr-FR" dirty="0" err="1"/>
-              <a:t>Ona</a:t>
-            </a:r>
-            <a:r>
-              <a:rPr lang="fr-FR" dirty="0"/>
-              <a:t> choisis d’utilise le </a:t>
+              <a:t>, Ona choisis d’utilise le </a:t>
             </a:r>
             <a:r>
               <a:rPr lang="fr-FR" dirty="0" err="1"/>
@@ -1087,7 +1081,6 @@
               <a:rPr lang="fr-FR" dirty="0"/>
               <a:t>, en fait </a:t>
             </a:r>
-            <a:endParaRPr lang="fr-FR" dirty="0" smtClean="0"/>
           </a:p>
           <a:p>
             <a:pPr marL="0" marR="0" lvl="0" indent="0" algn="l" defTabSz="914400" rtl="0" eaLnBrk="1" fontAlgn="auto" latinLnBrk="0" hangingPunct="1">
@@ -1109,7 +1102,7 @@
               <a:tabLst/>
               <a:defRPr/>
             </a:pPr>
-            <a:endParaRPr lang="fr-FR" dirty="0" smtClean="0"/>
+            <a:endParaRPr lang="fr-FR" dirty="0"/>
           </a:p>
           <a:p>
             <a:pPr marL="0" marR="0" lvl="0" indent="0" algn="l" defTabSz="914400" rtl="0" eaLnBrk="1" fontAlgn="auto" latinLnBrk="0" hangingPunct="1">
@@ -1132,14 +1125,14 @@
               <a:defRPr/>
             </a:pPr>
             <a:r>
-              <a:rPr lang="fr-FR" dirty="0" smtClean="0"/>
+              <a:rPr lang="fr-FR" dirty="0"/>
               <a:t>ON peux choisi cette application pour trouvez une solution de ce </a:t>
             </a:r>
             <a:r>
-              <a:rPr lang="fr-FR" dirty="0" err="1" smtClean="0"/>
+              <a:rPr lang="fr-FR" dirty="0" err="1"/>
               <a:t>problem</a:t>
             </a:r>
-            <a:endParaRPr lang="fr-FR" dirty="0" smtClean="0"/>
+            <a:endParaRPr lang="fr-FR" dirty="0"/>
           </a:p>
           <a:p>
             <a:pPr marL="0" marR="0" lvl="0" indent="0" algn="l" defTabSz="914400" rtl="0" eaLnBrk="1" fontAlgn="auto" latinLnBrk="0" hangingPunct="1">
@@ -1266,11 +1259,11 @@
               <a:buNone/>
             </a:pPr>
             <a:r>
-              <a:rPr lang="fr-FR" dirty="0" smtClean="0"/>
+              <a:rPr lang="fr-FR" dirty="0"/>
               <a:t>Donc on a choisir</a:t>
             </a:r>
             <a:r>
-              <a:rPr lang="fr-FR" baseline="0" dirty="0" smtClean="0"/>
+              <a:rPr lang="fr-FR" baseline="0" dirty="0"/>
               <a:t> 4 solution </a:t>
             </a:r>
           </a:p>
@@ -1284,7 +1277,7 @@
               </a:spcAft>
               <a:buNone/>
             </a:pPr>
-            <a:endParaRPr lang="fr-FR" baseline="0" dirty="0" smtClean="0"/>
+            <a:endParaRPr lang="fr-FR" baseline="0" dirty="0"/>
           </a:p>
           <a:p>
             <a:pPr marL="0" lvl="0" indent="0" algn="l" rtl="0">
@@ -1297,7 +1290,7 @@
               <a:buNone/>
             </a:pPr>
             <a:r>
-              <a:rPr lang="fr-FR" baseline="0" dirty="0" smtClean="0"/>
+              <a:rPr lang="fr-FR" baseline="0" dirty="0"/>
               <a:t>Notre application visé a 4 solution</a:t>
             </a:r>
             <a:endParaRPr dirty="0"/>
@@ -1404,7 +1397,7 @@
               </a:spcAft>
               <a:buNone/>
             </a:pPr>
-            <a:endParaRPr/>
+            <a:endParaRPr dirty="0"/>
           </a:p>
         </p:txBody>
       </p:sp>
@@ -2244,39 +2237,6 @@
 </file>
 
 <file path=ppt/slideLayouts/slideLayout3.xml><?xml version="1.0" encoding="utf-8"?>
-<p:sldLayout xmlns:a="http://schemas.openxmlformats.org/drawingml/2006/main" xmlns:r="http://schemas.openxmlformats.org/officeDocument/2006/relationships" xmlns:p="http://schemas.openxmlformats.org/presentationml/2006/main" matchingName="Blank" type="blank">
-  <p:cSld name="BLANK">
-    <p:bg>
-      <p:bgPr>
-        <a:solidFill>
-          <a:srgbClr val="FFFFFF"/>
-        </a:solidFill>
-        <a:effectLst/>
-      </p:bgPr>
-    </p:bg>
-    <p:spTree>
-      <p:nvGrpSpPr>
-        <p:cNvPr id="1" name="Shape 43"/>
-        <p:cNvGrpSpPr/>
-        <p:nvPr/>
-      </p:nvGrpSpPr>
-      <p:grpSpPr>
-        <a:xfrm>
-          <a:off x="0" y="0"/>
-          <a:ext cx="0" cy="0"/>
-          <a:chOff x="0" y="0"/>
-          <a:chExt cx="0" cy="0"/>
-        </a:xfrm>
-      </p:grpSpPr>
-    </p:spTree>
-  </p:cSld>
-  <p:clrMapOvr>
-    <a:masterClrMapping/>
-  </p:clrMapOvr>
-</p:sldLayout>
-</file>
-
-<file path=ppt/slideLayouts/slideLayout4.xml><?xml version="1.0" encoding="utf-8"?>
 <p:sldLayout xmlns:a="http://schemas.openxmlformats.org/drawingml/2006/main" xmlns:r="http://schemas.openxmlformats.org/officeDocument/2006/relationships" xmlns:p="http://schemas.openxmlformats.org/presentationml/2006/main" matchingName="Background">
   <p:cSld name="CUSTOM">
     <p:spTree>
@@ -2301,7 +2261,7 @@
 </p:sldLayout>
 </file>
 
-<file path=ppt/slideLayouts/slideLayout5.xml><?xml version="1.0" encoding="utf-8"?>
+<file path=ppt/slideLayouts/slideLayout4.xml><?xml version="1.0" encoding="utf-8"?>
 <p:sldLayout xmlns:a="http://schemas.openxmlformats.org/drawingml/2006/main" xmlns:r="http://schemas.openxmlformats.org/officeDocument/2006/relationships" xmlns:p="http://schemas.openxmlformats.org/presentationml/2006/main" matchingName="One column text 1">
   <p:cSld name="CUSTOM_1">
     <p:spTree>
@@ -2647,7 +2607,7 @@
 </p:sldLayout>
 </file>
 
-<file path=ppt/slideLayouts/slideLayout6.xml><?xml version="1.0" encoding="utf-8"?>
+<file path=ppt/slideLayouts/slideLayout5.xml><?xml version="1.0" encoding="utf-8"?>
 <p:sldLayout xmlns:a="http://schemas.openxmlformats.org/drawingml/2006/main" xmlns:r="http://schemas.openxmlformats.org/officeDocument/2006/relationships" xmlns:p="http://schemas.openxmlformats.org/presentationml/2006/main" matchingName="Title and text">
   <p:cSld name="ONE_COLUMN_TEXT_1_1">
     <p:spTree>
@@ -3046,7 +3006,7 @@
 </p:sldLayout>
 </file>
 
-<file path=ppt/slideLayouts/slideLayout7.xml><?xml version="1.0" encoding="utf-8"?>
+<file path=ppt/slideLayouts/slideLayout6.xml><?xml version="1.0" encoding="utf-8"?>
 <p:sldLayout xmlns:a="http://schemas.openxmlformats.org/drawingml/2006/main" xmlns:r="http://schemas.openxmlformats.org/officeDocument/2006/relationships" xmlns:p="http://schemas.openxmlformats.org/presentationml/2006/main" matchingName="Title and three columns 1">
   <p:cSld name="CUSTOM_9">
     <p:spTree>
@@ -5062,11 +5022,10 @@
   <p:sldLayoutIdLst>
     <p:sldLayoutId id="2147483648" r:id="rId1"/>
     <p:sldLayoutId id="2147483652" r:id="rId2"/>
-    <p:sldLayoutId id="2147483658" r:id="rId3"/>
-    <p:sldLayoutId id="2147483659" r:id="rId4"/>
-    <p:sldLayoutId id="2147483662" r:id="rId5"/>
-    <p:sldLayoutId id="2147483664" r:id="rId6"/>
-    <p:sldLayoutId id="2147483675" r:id="rId7"/>
+    <p:sldLayoutId id="2147483659" r:id="rId3"/>
+    <p:sldLayoutId id="2147483662" r:id="rId4"/>
+    <p:sldLayoutId id="2147483664" r:id="rId5"/>
+    <p:sldLayoutId id="2147483675" r:id="rId6"/>
   </p:sldLayoutIdLst>
   <mc:AlternateContent xmlns:mc="http://schemas.openxmlformats.org/markup-compatibility/2006" xmlns:p14="http://schemas.microsoft.com/office/powerpoint/2010/main">
     <mc:Choice Requires="p14">
@@ -5074,7 +5033,7 @@
         <p:fade thruBlk="1"/>
       </p:transition>
     </mc:Choice>
-    <mc:Fallback xmlns:ahyp="http://schemas.microsoft.com/office/drawing/2018/hyperlinkcolor" xmlns:p15="http://schemas.microsoft.com/office/powerpoint/2012/main" xmlns:com="http://schemas.openxmlformats.org/drawingml/2006/compatibility" xmlns:pvml="urn:schemas-microsoft-com:office:powerpoint" xmlns:v="urn:schemas-microsoft-com:vml" xmlns:o="urn:schemas-microsoft-com:office:office" xmlns:dgm="http://schemas.openxmlformats.org/drawingml/2006/diagram" xmlns:c="http://schemas.openxmlformats.org/drawingml/2006/chart" xmlns:mv="urn:schemas-microsoft-com:mac:vml" xmlns="">
+    <mc:Fallback xmlns="" xmlns:mv="urn:schemas-microsoft-com:mac:vml" xmlns:c="http://schemas.openxmlformats.org/drawingml/2006/chart" xmlns:dgm="http://schemas.openxmlformats.org/drawingml/2006/diagram" xmlns:o="urn:schemas-microsoft-com:office:office" xmlns:v="urn:schemas-microsoft-com:vml" xmlns:pvml="urn:schemas-microsoft-com:office:powerpoint" xmlns:com="http://schemas.openxmlformats.org/drawingml/2006/compatibility" xmlns:p15="http://schemas.microsoft.com/office/powerpoint/2012/main" xmlns:ahyp="http://schemas.microsoft.com/office/drawing/2018/hyperlinkcolor">
       <p:transition spd="slow">
         <p:fade/>
       </p:transition>
@@ -6343,8 +6302,8 @@
         </p:nvSpPr>
         <p:spPr>
           <a:xfrm>
-            <a:off x="73003" y="191730"/>
-            <a:ext cx="4907807" cy="3158122"/>
+            <a:off x="73003" y="436253"/>
+            <a:ext cx="4599797" cy="1766947"/>
           </a:xfrm>
           <a:prstGeom prst="rect">
             <a:avLst/>
@@ -6357,11 +6316,15 @@
           <a:lstStyle/>
           <a:p>
             <a:r>
-              <a:rPr lang="en" sz="5400" dirty="0"/>
-              <a:t>Marhaba: </a:t>
+              <a:rPr lang="en" sz="4400" dirty="0"/>
+              <a:t>Marhaba</a:t>
             </a:r>
             <a:r>
-              <a:rPr lang="fr-FR" sz="5400" dirty="0"/>
+              <a:rPr lang="en" sz="4000" dirty="0"/>
+              <a:t>: </a:t>
+            </a:r>
+            <a:r>
+              <a:rPr lang="fr-FR" sz="3600" dirty="0"/>
               <a:t>Votre Solution de Livraison de Repas</a:t>
             </a:r>
           </a:p>
@@ -6379,8 +6342,8 @@
         </p:nvSpPr>
         <p:spPr>
           <a:xfrm>
-            <a:off x="73004" y="3955175"/>
-            <a:ext cx="3850068" cy="985535"/>
+            <a:off x="73004" y="3153600"/>
+            <a:ext cx="1597396" cy="842400"/>
           </a:xfrm>
           <a:prstGeom prst="rect">
             <a:avLst/>
@@ -6402,16 +6365,16 @@
               <a:buNone/>
             </a:pPr>
             <a:r>
-              <a:rPr lang="en" sz="1800" dirty="0">
+              <a:rPr lang="en" sz="1600" dirty="0">
                 <a:solidFill>
                   <a:schemeClr val="accent6">
                     <a:lumMod val="75000"/>
                   </a:schemeClr>
                 </a:solidFill>
               </a:rPr>
-              <a:t>Preparer par: </a:t>
+              <a:t>Réalisé par: </a:t>
             </a:r>
-            <a:endParaRPr sz="1800" dirty="0">
+            <a:endParaRPr sz="1600" dirty="0">
               <a:solidFill>
                 <a:schemeClr val="accent6">
                   <a:lumMod val="75000"/>
@@ -6427,7 +6390,7 @@
               <a:buSzPts val="1600"/>
             </a:pPr>
             <a:r>
-              <a:rPr lang="fr-FR" sz="1800" dirty="0">
+              <a:rPr lang="fr-FR" sz="1100" dirty="0">
                 <a:solidFill>
                   <a:srgbClr val="002060"/>
                 </a:solidFill>
@@ -6435,7 +6398,7 @@
               <a:t>Mr </a:t>
             </a:r>
             <a:r>
-              <a:rPr lang="fr-FR" sz="1800" dirty="0" err="1">
+              <a:rPr lang="fr-FR" sz="1100" dirty="0" err="1">
                 <a:solidFill>
                   <a:srgbClr val="002060"/>
                 </a:solidFill>
@@ -6443,7 +6406,7 @@
               <a:t>Azeddine</a:t>
             </a:r>
             <a:r>
-              <a:rPr lang="fr-FR" sz="1800" dirty="0">
+              <a:rPr lang="fr-FR" sz="1100" dirty="0">
                 <a:solidFill>
                   <a:srgbClr val="002060"/>
                 </a:solidFill>
@@ -6451,14 +6414,14 @@
               <a:t> </a:t>
             </a:r>
             <a:r>
-              <a:rPr lang="fr-FR" sz="1800" dirty="0" err="1">
+              <a:rPr lang="fr-FR" sz="1100" dirty="0" err="1">
                 <a:solidFill>
                   <a:srgbClr val="002060"/>
                 </a:solidFill>
               </a:rPr>
               <a:t>Maslouh</a:t>
             </a:r>
-            <a:endParaRPr lang="fr-FR" sz="1800" dirty="0">
+            <a:endParaRPr lang="fr-FR" sz="1100" dirty="0">
               <a:solidFill>
                 <a:srgbClr val="002060"/>
               </a:solidFill>
@@ -6472,7 +6435,7 @@
               <a:buSzPts val="1600"/>
             </a:pPr>
             <a:r>
-              <a:rPr lang="fr-FR" sz="1800" dirty="0">
+              <a:rPr lang="fr-FR" sz="1100" dirty="0">
                 <a:solidFill>
                   <a:srgbClr val="002060"/>
                 </a:solidFill>
@@ -6480,14 +6443,14 @@
               <a:t>Mr Zakaria </a:t>
             </a:r>
             <a:r>
-              <a:rPr lang="fr-FR" sz="1800" dirty="0" err="1">
+              <a:rPr lang="fr-FR" sz="1100" dirty="0" err="1">
                 <a:solidFill>
                   <a:srgbClr val="002060"/>
                 </a:solidFill>
               </a:rPr>
               <a:t>kerkazou</a:t>
             </a:r>
-            <a:endParaRPr lang="fr-FR" sz="1800" dirty="0">
+            <a:endParaRPr lang="fr-FR" sz="1100" dirty="0">
               <a:solidFill>
                 <a:srgbClr val="002060"/>
               </a:solidFill>
@@ -13708,6 +13671,633 @@
           </p:txBody>
         </p:sp>
       </p:grpSp>
+      <p:sp>
+        <p:nvSpPr>
+          <p:cNvPr id="2" name="Google Shape;265;p48">
+            <a:extLst>
+              <a:ext uri="{FF2B5EF4-FFF2-40B4-BE49-F238E27FC236}">
+                <a16:creationId xmlns:a16="http://schemas.microsoft.com/office/drawing/2014/main" id="{F74BA647-D2A2-7A1A-2130-E445A78ABCB2}"/>
+              </a:ext>
+            </a:extLst>
+          </p:cNvPr>
+          <p:cNvSpPr txBox="1">
+            <a:spLocks/>
+          </p:cNvSpPr>
+          <p:nvPr/>
+        </p:nvSpPr>
+        <p:spPr>
+          <a:xfrm>
+            <a:off x="1670400" y="3110400"/>
+            <a:ext cx="2340000" cy="1065600"/>
+          </a:xfrm>
+          <a:prstGeom prst="rect">
+            <a:avLst/>
+          </a:prstGeom>
+          <a:noFill/>
+          <a:ln>
+            <a:noFill/>
+          </a:ln>
+        </p:spPr>
+        <p:txBody>
+          <a:bodyPr spcFirstLastPara="1" wrap="square" lIns="91425" tIns="91425" rIns="91425" bIns="91425" anchor="t" anchorCtr="0">
+            <a:noAutofit/>
+          </a:bodyPr>
+          <a:lstStyle>
+            <a:defPPr marR="0" lvl="0" algn="l" rtl="0">
+              <a:lnSpc>
+                <a:spcPct val="100000"/>
+              </a:lnSpc>
+              <a:spcBef>
+                <a:spcPts val="0"/>
+              </a:spcBef>
+              <a:spcAft>
+                <a:spcPts val="0"/>
+              </a:spcAft>
+            </a:defPPr>
+            <a:lvl1pPr marL="457200" marR="0" lvl="0" indent="-342900" algn="l" rtl="0">
+              <a:lnSpc>
+                <a:spcPct val="100000"/>
+              </a:lnSpc>
+              <a:spcBef>
+                <a:spcPts val="0"/>
+              </a:spcBef>
+              <a:spcAft>
+                <a:spcPts val="0"/>
+              </a:spcAft>
+              <a:buClr>
+                <a:schemeClr val="dk1"/>
+              </a:buClr>
+              <a:buSzPts val="2400"/>
+              <a:buFont typeface="Roboto"/>
+              <a:buNone/>
+              <a:defRPr sz="2400" b="0" i="0" u="none" strike="noStrike" cap="none">
+                <a:solidFill>
+                  <a:schemeClr val="dk1"/>
+                </a:solidFill>
+                <a:latin typeface="Roboto"/>
+                <a:ea typeface="Roboto"/>
+                <a:cs typeface="Roboto"/>
+                <a:sym typeface="Roboto"/>
+              </a:defRPr>
+            </a:lvl1pPr>
+            <a:lvl2pPr marL="914400" marR="0" lvl="1" indent="-317500" algn="l" rtl="0">
+              <a:lnSpc>
+                <a:spcPct val="100000"/>
+              </a:lnSpc>
+              <a:spcBef>
+                <a:spcPts val="0"/>
+              </a:spcBef>
+              <a:spcAft>
+                <a:spcPts val="0"/>
+              </a:spcAft>
+              <a:buClr>
+                <a:schemeClr val="dk1"/>
+              </a:buClr>
+              <a:buSzPts val="2400"/>
+              <a:buFont typeface="Roboto"/>
+              <a:buNone/>
+              <a:defRPr sz="2400" b="0" i="0" u="none" strike="noStrike" cap="none">
+                <a:solidFill>
+                  <a:schemeClr val="dk1"/>
+                </a:solidFill>
+                <a:latin typeface="Roboto"/>
+                <a:ea typeface="Roboto"/>
+                <a:cs typeface="Roboto"/>
+                <a:sym typeface="Roboto"/>
+              </a:defRPr>
+            </a:lvl2pPr>
+            <a:lvl3pPr marL="1371600" marR="0" lvl="2" indent="-317500" algn="l" rtl="0">
+              <a:lnSpc>
+                <a:spcPct val="100000"/>
+              </a:lnSpc>
+              <a:spcBef>
+                <a:spcPts val="0"/>
+              </a:spcBef>
+              <a:spcAft>
+                <a:spcPts val="0"/>
+              </a:spcAft>
+              <a:buClr>
+                <a:schemeClr val="dk1"/>
+              </a:buClr>
+              <a:buSzPts val="2400"/>
+              <a:buFont typeface="Roboto"/>
+              <a:buNone/>
+              <a:defRPr sz="2400" b="0" i="0" u="none" strike="noStrike" cap="none">
+                <a:solidFill>
+                  <a:schemeClr val="dk1"/>
+                </a:solidFill>
+                <a:latin typeface="Roboto"/>
+                <a:ea typeface="Roboto"/>
+                <a:cs typeface="Roboto"/>
+                <a:sym typeface="Roboto"/>
+              </a:defRPr>
+            </a:lvl3pPr>
+            <a:lvl4pPr marL="1828800" marR="0" lvl="3" indent="-317500" algn="l" rtl="0">
+              <a:lnSpc>
+                <a:spcPct val="100000"/>
+              </a:lnSpc>
+              <a:spcBef>
+                <a:spcPts val="0"/>
+              </a:spcBef>
+              <a:spcAft>
+                <a:spcPts val="0"/>
+              </a:spcAft>
+              <a:buClr>
+                <a:schemeClr val="dk1"/>
+              </a:buClr>
+              <a:buSzPts val="2400"/>
+              <a:buFont typeface="Roboto"/>
+              <a:buNone/>
+              <a:defRPr sz="2400" b="0" i="0" u="none" strike="noStrike" cap="none">
+                <a:solidFill>
+                  <a:schemeClr val="dk1"/>
+                </a:solidFill>
+                <a:latin typeface="Roboto"/>
+                <a:ea typeface="Roboto"/>
+                <a:cs typeface="Roboto"/>
+                <a:sym typeface="Roboto"/>
+              </a:defRPr>
+            </a:lvl4pPr>
+            <a:lvl5pPr marL="2286000" marR="0" lvl="4" indent="-317500" algn="l" rtl="0">
+              <a:lnSpc>
+                <a:spcPct val="100000"/>
+              </a:lnSpc>
+              <a:spcBef>
+                <a:spcPts val="0"/>
+              </a:spcBef>
+              <a:spcAft>
+                <a:spcPts val="0"/>
+              </a:spcAft>
+              <a:buClr>
+                <a:schemeClr val="dk1"/>
+              </a:buClr>
+              <a:buSzPts val="2400"/>
+              <a:buFont typeface="Roboto"/>
+              <a:buNone/>
+              <a:defRPr sz="2400" b="0" i="0" u="none" strike="noStrike" cap="none">
+                <a:solidFill>
+                  <a:schemeClr val="dk1"/>
+                </a:solidFill>
+                <a:latin typeface="Roboto"/>
+                <a:ea typeface="Roboto"/>
+                <a:cs typeface="Roboto"/>
+                <a:sym typeface="Roboto"/>
+              </a:defRPr>
+            </a:lvl5pPr>
+            <a:lvl6pPr marL="2743200" marR="0" lvl="5" indent="-317500" algn="l" rtl="0">
+              <a:lnSpc>
+                <a:spcPct val="100000"/>
+              </a:lnSpc>
+              <a:spcBef>
+                <a:spcPts val="0"/>
+              </a:spcBef>
+              <a:spcAft>
+                <a:spcPts val="0"/>
+              </a:spcAft>
+              <a:buClr>
+                <a:schemeClr val="dk1"/>
+              </a:buClr>
+              <a:buSzPts val="2400"/>
+              <a:buFont typeface="Roboto"/>
+              <a:buNone/>
+              <a:defRPr sz="2400" b="0" i="0" u="none" strike="noStrike" cap="none">
+                <a:solidFill>
+                  <a:schemeClr val="dk1"/>
+                </a:solidFill>
+                <a:latin typeface="Roboto"/>
+                <a:ea typeface="Roboto"/>
+                <a:cs typeface="Roboto"/>
+                <a:sym typeface="Roboto"/>
+              </a:defRPr>
+            </a:lvl6pPr>
+            <a:lvl7pPr marL="3200400" marR="0" lvl="6" indent="-317500" algn="l" rtl="0">
+              <a:lnSpc>
+                <a:spcPct val="100000"/>
+              </a:lnSpc>
+              <a:spcBef>
+                <a:spcPts val="0"/>
+              </a:spcBef>
+              <a:spcAft>
+                <a:spcPts val="0"/>
+              </a:spcAft>
+              <a:buClr>
+                <a:schemeClr val="dk1"/>
+              </a:buClr>
+              <a:buSzPts val="2400"/>
+              <a:buFont typeface="Roboto"/>
+              <a:buNone/>
+              <a:defRPr sz="2400" b="0" i="0" u="none" strike="noStrike" cap="none">
+                <a:solidFill>
+                  <a:schemeClr val="dk1"/>
+                </a:solidFill>
+                <a:latin typeface="Roboto"/>
+                <a:ea typeface="Roboto"/>
+                <a:cs typeface="Roboto"/>
+                <a:sym typeface="Roboto"/>
+              </a:defRPr>
+            </a:lvl7pPr>
+            <a:lvl8pPr marL="3657600" marR="0" lvl="7" indent="-317500" algn="l" rtl="0">
+              <a:lnSpc>
+                <a:spcPct val="100000"/>
+              </a:lnSpc>
+              <a:spcBef>
+                <a:spcPts val="0"/>
+              </a:spcBef>
+              <a:spcAft>
+                <a:spcPts val="0"/>
+              </a:spcAft>
+              <a:buClr>
+                <a:schemeClr val="dk1"/>
+              </a:buClr>
+              <a:buSzPts val="2400"/>
+              <a:buFont typeface="Roboto"/>
+              <a:buNone/>
+              <a:defRPr sz="2400" b="0" i="0" u="none" strike="noStrike" cap="none">
+                <a:solidFill>
+                  <a:schemeClr val="dk1"/>
+                </a:solidFill>
+                <a:latin typeface="Roboto"/>
+                <a:ea typeface="Roboto"/>
+                <a:cs typeface="Roboto"/>
+                <a:sym typeface="Roboto"/>
+              </a:defRPr>
+            </a:lvl8pPr>
+            <a:lvl9pPr marL="4114800" marR="0" lvl="8" indent="-317500" algn="l" rtl="0">
+              <a:lnSpc>
+                <a:spcPct val="100000"/>
+              </a:lnSpc>
+              <a:spcBef>
+                <a:spcPts val="0"/>
+              </a:spcBef>
+              <a:spcAft>
+                <a:spcPts val="0"/>
+              </a:spcAft>
+              <a:buClr>
+                <a:schemeClr val="dk1"/>
+              </a:buClr>
+              <a:buSzPts val="2400"/>
+              <a:buFont typeface="Roboto"/>
+              <a:buNone/>
+              <a:defRPr sz="2400" b="0" i="0" u="none" strike="noStrike" cap="none">
+                <a:solidFill>
+                  <a:schemeClr val="dk1"/>
+                </a:solidFill>
+                <a:latin typeface="Roboto"/>
+                <a:ea typeface="Roboto"/>
+                <a:cs typeface="Roboto"/>
+                <a:sym typeface="Roboto"/>
+              </a:defRPr>
+            </a:lvl9pPr>
+          </a:lstStyle>
+          <a:p>
+            <a:pPr marL="0" indent="0"/>
+            <a:r>
+              <a:rPr lang="en-US" sz="1600" dirty="0" err="1">
+                <a:solidFill>
+                  <a:schemeClr val="accent6">
+                    <a:lumMod val="75000"/>
+                  </a:schemeClr>
+                </a:solidFill>
+              </a:rPr>
+              <a:t>Membres</a:t>
+            </a:r>
+            <a:r>
+              <a:rPr lang="en-US" sz="1600" dirty="0">
+                <a:solidFill>
+                  <a:schemeClr val="accent6">
+                    <a:lumMod val="75000"/>
+                  </a:schemeClr>
+                </a:solidFill>
+              </a:rPr>
+              <a:t> du jury: </a:t>
+            </a:r>
+          </a:p>
+          <a:p>
+            <a:pPr marL="0" indent="0">
+              <a:lnSpc>
+                <a:spcPct val="114000"/>
+              </a:lnSpc>
+              <a:buSzPts val="1600"/>
+            </a:pPr>
+            <a:r>
+              <a:rPr lang="en-US" sz="1100" dirty="0">
+                <a:solidFill>
+                  <a:srgbClr val="002060"/>
+                </a:solidFill>
+              </a:rPr>
+              <a:t>Pr. Younes LAKHRISSI</a:t>
+            </a:r>
+          </a:p>
+          <a:p>
+            <a:pPr marL="0" indent="0">
+              <a:lnSpc>
+                <a:spcPct val="114000"/>
+              </a:lnSpc>
+              <a:buSzPts val="1600"/>
+            </a:pPr>
+            <a:r>
+              <a:rPr lang="en-US" sz="1100" dirty="0">
+                <a:solidFill>
+                  <a:srgbClr val="002060"/>
+                </a:solidFill>
+              </a:rPr>
+              <a:t>Pr. Youness IDRISSI KHAMLICHI</a:t>
+            </a:r>
+          </a:p>
+        </p:txBody>
+      </p:sp>
+      <p:sp>
+        <p:nvSpPr>
+          <p:cNvPr id="3" name="TextBox 11">
+            <a:extLst>
+              <a:ext uri="{FF2B5EF4-FFF2-40B4-BE49-F238E27FC236}">
+                <a16:creationId xmlns:a16="http://schemas.microsoft.com/office/drawing/2014/main" id="{0AC3E2FC-D714-6822-5C2E-97B56CB276B3}"/>
+              </a:ext>
+            </a:extLst>
+          </p:cNvPr>
+          <p:cNvSpPr txBox="1"/>
+          <p:nvPr/>
+        </p:nvSpPr>
+        <p:spPr>
+          <a:xfrm>
+            <a:off x="0" y="4399470"/>
+            <a:ext cx="4233600" cy="307777"/>
+          </a:xfrm>
+          <a:prstGeom prst="rect">
+            <a:avLst/>
+          </a:prstGeom>
+          <a:noFill/>
+        </p:spPr>
+        <p:txBody>
+          <a:bodyPr wrap="square">
+            <a:spAutoFit/>
+          </a:bodyPr>
+          <a:lstStyle>
+            <a:defPPr>
+              <a:defRPr lang="en-US"/>
+            </a:defPPr>
+            <a:lvl1pPr marL="0" algn="l" defTabSz="457200" rtl="0" eaLnBrk="1" latinLnBrk="0" hangingPunct="1">
+              <a:defRPr sz="1800" kern="1200">
+                <a:solidFill>
+                  <a:schemeClr val="tx1"/>
+                </a:solidFill>
+                <a:latin typeface="+mn-lt"/>
+                <a:ea typeface="+mn-ea"/>
+                <a:cs typeface="+mn-cs"/>
+              </a:defRPr>
+            </a:lvl1pPr>
+            <a:lvl2pPr marL="457200" algn="l" defTabSz="457200" rtl="0" eaLnBrk="1" latinLnBrk="0" hangingPunct="1">
+              <a:defRPr sz="1800" kern="1200">
+                <a:solidFill>
+                  <a:schemeClr val="tx1"/>
+                </a:solidFill>
+                <a:latin typeface="+mn-lt"/>
+                <a:ea typeface="+mn-ea"/>
+                <a:cs typeface="+mn-cs"/>
+              </a:defRPr>
+            </a:lvl2pPr>
+            <a:lvl3pPr marL="914400" algn="l" defTabSz="457200" rtl="0" eaLnBrk="1" latinLnBrk="0" hangingPunct="1">
+              <a:defRPr sz="1800" kern="1200">
+                <a:solidFill>
+                  <a:schemeClr val="tx1"/>
+                </a:solidFill>
+                <a:latin typeface="+mn-lt"/>
+                <a:ea typeface="+mn-ea"/>
+                <a:cs typeface="+mn-cs"/>
+              </a:defRPr>
+            </a:lvl3pPr>
+            <a:lvl4pPr marL="1371600" algn="l" defTabSz="457200" rtl="0" eaLnBrk="1" latinLnBrk="0" hangingPunct="1">
+              <a:defRPr sz="1800" kern="1200">
+                <a:solidFill>
+                  <a:schemeClr val="tx1"/>
+                </a:solidFill>
+                <a:latin typeface="+mn-lt"/>
+                <a:ea typeface="+mn-ea"/>
+                <a:cs typeface="+mn-cs"/>
+              </a:defRPr>
+            </a:lvl4pPr>
+            <a:lvl5pPr marL="1828800" algn="l" defTabSz="457200" rtl="0" eaLnBrk="1" latinLnBrk="0" hangingPunct="1">
+              <a:defRPr sz="1800" kern="1200">
+                <a:solidFill>
+                  <a:schemeClr val="tx1"/>
+                </a:solidFill>
+                <a:latin typeface="+mn-lt"/>
+                <a:ea typeface="+mn-ea"/>
+                <a:cs typeface="+mn-cs"/>
+              </a:defRPr>
+            </a:lvl5pPr>
+            <a:lvl6pPr marL="2286000" algn="l" defTabSz="457200" rtl="0" eaLnBrk="1" latinLnBrk="0" hangingPunct="1">
+              <a:defRPr sz="1800" kern="1200">
+                <a:solidFill>
+                  <a:schemeClr val="tx1"/>
+                </a:solidFill>
+                <a:latin typeface="+mn-lt"/>
+                <a:ea typeface="+mn-ea"/>
+                <a:cs typeface="+mn-cs"/>
+              </a:defRPr>
+            </a:lvl6pPr>
+            <a:lvl7pPr marL="2743200" algn="l" defTabSz="457200" rtl="0" eaLnBrk="1" latinLnBrk="0" hangingPunct="1">
+              <a:defRPr sz="1800" kern="1200">
+                <a:solidFill>
+                  <a:schemeClr val="tx1"/>
+                </a:solidFill>
+                <a:latin typeface="+mn-lt"/>
+                <a:ea typeface="+mn-ea"/>
+                <a:cs typeface="+mn-cs"/>
+              </a:defRPr>
+            </a:lvl7pPr>
+            <a:lvl8pPr marL="3200400" algn="l" defTabSz="457200" rtl="0" eaLnBrk="1" latinLnBrk="0" hangingPunct="1">
+              <a:defRPr sz="1800" kern="1200">
+                <a:solidFill>
+                  <a:schemeClr val="tx1"/>
+                </a:solidFill>
+                <a:latin typeface="+mn-lt"/>
+                <a:ea typeface="+mn-ea"/>
+                <a:cs typeface="+mn-cs"/>
+              </a:defRPr>
+            </a:lvl8pPr>
+            <a:lvl9pPr marL="3657600" algn="l" defTabSz="457200" rtl="0" eaLnBrk="1" latinLnBrk="0" hangingPunct="1">
+              <a:defRPr sz="1800" kern="1200">
+                <a:solidFill>
+                  <a:schemeClr val="tx1"/>
+                </a:solidFill>
+                <a:latin typeface="+mn-lt"/>
+                <a:ea typeface="+mn-ea"/>
+                <a:cs typeface="+mn-cs"/>
+              </a:defRPr>
+            </a:lvl9pPr>
+          </a:lstStyle>
+          <a:p>
+            <a:pPr>
+              <a:defRPr sz="1400">
+                <a:solidFill>
+                  <a:srgbClr val="666973"/>
+                </a:solidFill>
+                <a:latin typeface="Aptos"/>
+              </a:defRPr>
+            </a:pPr>
+            <a:r>
+              <a:rPr dirty="0" err="1"/>
+              <a:t>Projet</a:t>
+            </a:r>
+            <a:r>
+              <a:rPr dirty="0"/>
+              <a:t> de Fin </a:t>
+            </a:r>
+            <a:r>
+              <a:rPr dirty="0" err="1"/>
+              <a:t>d’Études</a:t>
+            </a:r>
+            <a:r>
+              <a:rPr dirty="0"/>
+              <a:t> • </a:t>
+            </a:r>
+            <a:r>
+              <a:rPr dirty="0" err="1"/>
+              <a:t>Filière</a:t>
+            </a:r>
+            <a:r>
+              <a:rPr dirty="0"/>
+              <a:t> DLA • Option IFSMD</a:t>
+            </a:r>
+          </a:p>
+        </p:txBody>
+      </p:sp>
+      <p:sp>
+        <p:nvSpPr>
+          <p:cNvPr id="4" name="TextBox 13">
+            <a:extLst>
+              <a:ext uri="{FF2B5EF4-FFF2-40B4-BE49-F238E27FC236}">
+                <a16:creationId xmlns:a16="http://schemas.microsoft.com/office/drawing/2014/main" id="{6D27B21E-6D58-F40A-B556-98ED0F899601}"/>
+              </a:ext>
+            </a:extLst>
+          </p:cNvPr>
+          <p:cNvSpPr txBox="1"/>
+          <p:nvPr/>
+        </p:nvSpPr>
+        <p:spPr>
+          <a:xfrm>
+            <a:off x="0" y="4732020"/>
+            <a:ext cx="6400800" cy="411480"/>
+          </a:xfrm>
+          <a:prstGeom prst="rect">
+            <a:avLst/>
+          </a:prstGeom>
+          <a:noFill/>
+        </p:spPr>
+        <p:txBody>
+          <a:bodyPr wrap="none">
+            <a:spAutoFit/>
+          </a:bodyPr>
+          <a:lstStyle>
+            <a:defPPr>
+              <a:defRPr lang="en-US"/>
+            </a:defPPr>
+            <a:lvl1pPr marL="0" algn="l" defTabSz="457200" rtl="0" eaLnBrk="1" latinLnBrk="0" hangingPunct="1">
+              <a:defRPr sz="1800" kern="1200">
+                <a:solidFill>
+                  <a:schemeClr val="tx1"/>
+                </a:solidFill>
+                <a:latin typeface="+mn-lt"/>
+                <a:ea typeface="+mn-ea"/>
+                <a:cs typeface="+mn-cs"/>
+              </a:defRPr>
+            </a:lvl1pPr>
+            <a:lvl2pPr marL="457200" algn="l" defTabSz="457200" rtl="0" eaLnBrk="1" latinLnBrk="0" hangingPunct="1">
+              <a:defRPr sz="1800" kern="1200">
+                <a:solidFill>
+                  <a:schemeClr val="tx1"/>
+                </a:solidFill>
+                <a:latin typeface="+mn-lt"/>
+                <a:ea typeface="+mn-ea"/>
+                <a:cs typeface="+mn-cs"/>
+              </a:defRPr>
+            </a:lvl2pPr>
+            <a:lvl3pPr marL="914400" algn="l" defTabSz="457200" rtl="0" eaLnBrk="1" latinLnBrk="0" hangingPunct="1">
+              <a:defRPr sz="1800" kern="1200">
+                <a:solidFill>
+                  <a:schemeClr val="tx1"/>
+                </a:solidFill>
+                <a:latin typeface="+mn-lt"/>
+                <a:ea typeface="+mn-ea"/>
+                <a:cs typeface="+mn-cs"/>
+              </a:defRPr>
+            </a:lvl3pPr>
+            <a:lvl4pPr marL="1371600" algn="l" defTabSz="457200" rtl="0" eaLnBrk="1" latinLnBrk="0" hangingPunct="1">
+              <a:defRPr sz="1800" kern="1200">
+                <a:solidFill>
+                  <a:schemeClr val="tx1"/>
+                </a:solidFill>
+                <a:latin typeface="+mn-lt"/>
+                <a:ea typeface="+mn-ea"/>
+                <a:cs typeface="+mn-cs"/>
+              </a:defRPr>
+            </a:lvl4pPr>
+            <a:lvl5pPr marL="1828800" algn="l" defTabSz="457200" rtl="0" eaLnBrk="1" latinLnBrk="0" hangingPunct="1">
+              <a:defRPr sz="1800" kern="1200">
+                <a:solidFill>
+                  <a:schemeClr val="tx1"/>
+                </a:solidFill>
+                <a:latin typeface="+mn-lt"/>
+                <a:ea typeface="+mn-ea"/>
+                <a:cs typeface="+mn-cs"/>
+              </a:defRPr>
+            </a:lvl5pPr>
+            <a:lvl6pPr marL="2286000" algn="l" defTabSz="457200" rtl="0" eaLnBrk="1" latinLnBrk="0" hangingPunct="1">
+              <a:defRPr sz="1800" kern="1200">
+                <a:solidFill>
+                  <a:schemeClr val="tx1"/>
+                </a:solidFill>
+                <a:latin typeface="+mn-lt"/>
+                <a:ea typeface="+mn-ea"/>
+                <a:cs typeface="+mn-cs"/>
+              </a:defRPr>
+            </a:lvl6pPr>
+            <a:lvl7pPr marL="2743200" algn="l" defTabSz="457200" rtl="0" eaLnBrk="1" latinLnBrk="0" hangingPunct="1">
+              <a:defRPr sz="1800" kern="1200">
+                <a:solidFill>
+                  <a:schemeClr val="tx1"/>
+                </a:solidFill>
+                <a:latin typeface="+mn-lt"/>
+                <a:ea typeface="+mn-ea"/>
+                <a:cs typeface="+mn-cs"/>
+              </a:defRPr>
+            </a:lvl7pPr>
+            <a:lvl8pPr marL="3200400" algn="l" defTabSz="457200" rtl="0" eaLnBrk="1" latinLnBrk="0" hangingPunct="1">
+              <a:defRPr sz="1800" kern="1200">
+                <a:solidFill>
+                  <a:schemeClr val="tx1"/>
+                </a:solidFill>
+                <a:latin typeface="+mn-lt"/>
+                <a:ea typeface="+mn-ea"/>
+                <a:cs typeface="+mn-cs"/>
+              </a:defRPr>
+            </a:lvl8pPr>
+            <a:lvl9pPr marL="3657600" algn="l" defTabSz="457200" rtl="0" eaLnBrk="1" latinLnBrk="0" hangingPunct="1">
+              <a:defRPr sz="1800" kern="1200">
+                <a:solidFill>
+                  <a:schemeClr val="tx1"/>
+                </a:solidFill>
+                <a:latin typeface="+mn-lt"/>
+                <a:ea typeface="+mn-ea"/>
+                <a:cs typeface="+mn-cs"/>
+              </a:defRPr>
+            </a:lvl9pPr>
+          </a:lstStyle>
+          <a:p>
+            <a:pPr>
+              <a:defRPr sz="1100">
+                <a:solidFill>
+                  <a:srgbClr val="183166"/>
+                </a:solidFill>
+              </a:defRPr>
+            </a:pPr>
+            <a:r>
+              <a:t>Université Sidi Mohamed Ben Abdellah — ENSA Fès</a:t>
+            </a:r>
+          </a:p>
+        </p:txBody>
+      </p:sp>
     </p:spTree>
   </p:cSld>
   <p:clrMapOvr>
@@ -14228,6 +14818,339 @@
                       </p:childTnLst>
                     </p:cTn>
                   </p:par>
+                  <p:par>
+                    <p:cTn id="35" fill="hold">
+                      <p:stCondLst>
+                        <p:cond delay="indefinite"/>
+                      </p:stCondLst>
+                      <p:childTnLst>
+                        <p:par>
+                          <p:cTn id="36" fill="hold">
+                            <p:stCondLst>
+                              <p:cond delay="0"/>
+                            </p:stCondLst>
+                            <p:childTnLst>
+                              <p:par>
+                                <p:cTn id="37" presetID="42" presetClass="entr" presetSubtype="0" fill="hold" grpId="0" nodeType="clickEffect">
+                                  <p:stCondLst>
+                                    <p:cond delay="0"/>
+                                  </p:stCondLst>
+                                  <p:childTnLst>
+                                    <p:set>
+                                      <p:cBhvr>
+                                        <p:cTn id="38" dur="1" fill="hold">
+                                          <p:stCondLst>
+                                            <p:cond delay="0"/>
+                                          </p:stCondLst>
+                                        </p:cTn>
+                                        <p:tgtEl>
+                                          <p:spTgt spid="2">
+                                            <p:txEl>
+                                              <p:pRg st="0" end="0"/>
+                                            </p:txEl>
+                                          </p:spTgt>
+                                        </p:tgtEl>
+                                        <p:attrNameLst>
+                                          <p:attrName>style.visibility</p:attrName>
+                                        </p:attrNameLst>
+                                      </p:cBhvr>
+                                      <p:to>
+                                        <p:strVal val="visible"/>
+                                      </p:to>
+                                    </p:set>
+                                    <p:animEffect transition="in" filter="fade">
+                                      <p:cBhvr>
+                                        <p:cTn id="39" dur="1000"/>
+                                        <p:tgtEl>
+                                          <p:spTgt spid="2">
+                                            <p:txEl>
+                                              <p:pRg st="0" end="0"/>
+                                            </p:txEl>
+                                          </p:spTgt>
+                                        </p:tgtEl>
+                                      </p:cBhvr>
+                                    </p:animEffect>
+                                    <p:anim calcmode="lin" valueType="num">
+                                      <p:cBhvr>
+                                        <p:cTn id="40" dur="1000" fill="hold"/>
+                                        <p:tgtEl>
+                                          <p:spTgt spid="2">
+                                            <p:txEl>
+                                              <p:pRg st="0" end="0"/>
+                                            </p:txEl>
+                                          </p:spTgt>
+                                        </p:tgtEl>
+                                        <p:attrNameLst>
+                                          <p:attrName>ppt_x</p:attrName>
+                                        </p:attrNameLst>
+                                      </p:cBhvr>
+                                      <p:tavLst>
+                                        <p:tav tm="0">
+                                          <p:val>
+                                            <p:strVal val="#ppt_x"/>
+                                          </p:val>
+                                        </p:tav>
+                                        <p:tav tm="100000">
+                                          <p:val>
+                                            <p:strVal val="#ppt_x"/>
+                                          </p:val>
+                                        </p:tav>
+                                      </p:tavLst>
+                                    </p:anim>
+                                    <p:anim calcmode="lin" valueType="num">
+                                      <p:cBhvr>
+                                        <p:cTn id="41" dur="1000" fill="hold"/>
+                                        <p:tgtEl>
+                                          <p:spTgt spid="2">
+                                            <p:txEl>
+                                              <p:pRg st="0" end="0"/>
+                                            </p:txEl>
+                                          </p:spTgt>
+                                        </p:tgtEl>
+                                        <p:attrNameLst>
+                                          <p:attrName>ppt_y</p:attrName>
+                                        </p:attrNameLst>
+                                      </p:cBhvr>
+                                      <p:tavLst>
+                                        <p:tav tm="0">
+                                          <p:val>
+                                            <p:strVal val="#ppt_y+.1"/>
+                                          </p:val>
+                                        </p:tav>
+                                        <p:tav tm="100000">
+                                          <p:val>
+                                            <p:strVal val="#ppt_y"/>
+                                          </p:val>
+                                        </p:tav>
+                                      </p:tavLst>
+                                    </p:anim>
+                                  </p:childTnLst>
+                                </p:cTn>
+                              </p:par>
+                            </p:childTnLst>
+                          </p:cTn>
+                        </p:par>
+                      </p:childTnLst>
+                    </p:cTn>
+                  </p:par>
+                  <p:par>
+                    <p:cTn id="42" fill="hold">
+                      <p:stCondLst>
+                        <p:cond delay="indefinite"/>
+                      </p:stCondLst>
+                      <p:childTnLst>
+                        <p:par>
+                          <p:cTn id="43" fill="hold">
+                            <p:stCondLst>
+                              <p:cond delay="0"/>
+                            </p:stCondLst>
+                            <p:childTnLst>
+                              <p:par>
+                                <p:cTn id="44" presetID="42" presetClass="entr" presetSubtype="0" fill="hold" grpId="0" nodeType="clickEffect">
+                                  <p:stCondLst>
+                                    <p:cond delay="0"/>
+                                  </p:stCondLst>
+                                  <p:childTnLst>
+                                    <p:set>
+                                      <p:cBhvr>
+                                        <p:cTn id="45" dur="1" fill="hold">
+                                          <p:stCondLst>
+                                            <p:cond delay="0"/>
+                                          </p:stCondLst>
+                                        </p:cTn>
+                                        <p:tgtEl>
+                                          <p:spTgt spid="2">
+                                            <p:txEl>
+                                              <p:pRg st="1" end="1"/>
+                                            </p:txEl>
+                                          </p:spTgt>
+                                        </p:tgtEl>
+                                        <p:attrNameLst>
+                                          <p:attrName>style.visibility</p:attrName>
+                                        </p:attrNameLst>
+                                      </p:cBhvr>
+                                      <p:to>
+                                        <p:strVal val="visible"/>
+                                      </p:to>
+                                    </p:set>
+                                    <p:animEffect transition="in" filter="fade">
+                                      <p:cBhvr>
+                                        <p:cTn id="46" dur="1000"/>
+                                        <p:tgtEl>
+                                          <p:spTgt spid="2">
+                                            <p:txEl>
+                                              <p:pRg st="1" end="1"/>
+                                            </p:txEl>
+                                          </p:spTgt>
+                                        </p:tgtEl>
+                                      </p:cBhvr>
+                                    </p:animEffect>
+                                    <p:anim calcmode="lin" valueType="num">
+                                      <p:cBhvr>
+                                        <p:cTn id="47" dur="1000" fill="hold"/>
+                                        <p:tgtEl>
+                                          <p:spTgt spid="2">
+                                            <p:txEl>
+                                              <p:pRg st="1" end="1"/>
+                                            </p:txEl>
+                                          </p:spTgt>
+                                        </p:tgtEl>
+                                        <p:attrNameLst>
+                                          <p:attrName>ppt_x</p:attrName>
+                                        </p:attrNameLst>
+                                      </p:cBhvr>
+                                      <p:tavLst>
+                                        <p:tav tm="0">
+                                          <p:val>
+                                            <p:strVal val="#ppt_x"/>
+                                          </p:val>
+                                        </p:tav>
+                                        <p:tav tm="100000">
+                                          <p:val>
+                                            <p:strVal val="#ppt_x"/>
+                                          </p:val>
+                                        </p:tav>
+                                      </p:tavLst>
+                                    </p:anim>
+                                    <p:anim calcmode="lin" valueType="num">
+                                      <p:cBhvr>
+                                        <p:cTn id="48" dur="1000" fill="hold"/>
+                                        <p:tgtEl>
+                                          <p:spTgt spid="2">
+                                            <p:txEl>
+                                              <p:pRg st="1" end="1"/>
+                                            </p:txEl>
+                                          </p:spTgt>
+                                        </p:tgtEl>
+                                        <p:attrNameLst>
+                                          <p:attrName>ppt_y</p:attrName>
+                                        </p:attrNameLst>
+                                      </p:cBhvr>
+                                      <p:tavLst>
+                                        <p:tav tm="0">
+                                          <p:val>
+                                            <p:strVal val="#ppt_y+.1"/>
+                                          </p:val>
+                                        </p:tav>
+                                        <p:tav tm="100000">
+                                          <p:val>
+                                            <p:strVal val="#ppt_y"/>
+                                          </p:val>
+                                        </p:tav>
+                                      </p:tavLst>
+                                    </p:anim>
+                                  </p:childTnLst>
+                                </p:cTn>
+                              </p:par>
+                            </p:childTnLst>
+                          </p:cTn>
+                        </p:par>
+                      </p:childTnLst>
+                    </p:cTn>
+                  </p:par>
+                  <p:par>
+                    <p:cTn id="49" fill="hold">
+                      <p:stCondLst>
+                        <p:cond delay="indefinite"/>
+                      </p:stCondLst>
+                      <p:childTnLst>
+                        <p:par>
+                          <p:cTn id="50" fill="hold">
+                            <p:stCondLst>
+                              <p:cond delay="0"/>
+                            </p:stCondLst>
+                            <p:childTnLst>
+                              <p:par>
+                                <p:cTn id="51" presetID="2" presetClass="entr" presetSubtype="4" fill="hold" nodeType="clickEffect">
+                                  <p:stCondLst>
+                                    <p:cond delay="0"/>
+                                  </p:stCondLst>
+                                  <p:childTnLst>
+                                    <p:set>
+                                      <p:cBhvr>
+                                        <p:cTn id="52" dur="1" fill="hold">
+                                          <p:stCondLst>
+                                            <p:cond delay="0"/>
+                                          </p:stCondLst>
+                                        </p:cTn>
+                                        <p:tgtEl>
+                                          <p:spTgt spid="2">
+                                            <p:txEl>
+                                              <p:pRg st="2" end="2"/>
+                                            </p:txEl>
+                                          </p:spTgt>
+                                        </p:tgtEl>
+                                        <p:attrNameLst>
+                                          <p:attrName>style.visibility</p:attrName>
+                                        </p:attrNameLst>
+                                      </p:cBhvr>
+                                      <p:to>
+                                        <p:strVal val="visible"/>
+                                      </p:to>
+                                    </p:set>
+                                    <p:anim calcmode="lin" valueType="num">
+                                      <p:cBhvr additive="base">
+                                        <p:cTn id="53" dur="500" fill="hold"/>
+                                        <p:tgtEl>
+                                          <p:spTgt spid="2">
+                                            <p:txEl>
+                                              <p:pRg st="2" end="2"/>
+                                            </p:txEl>
+                                          </p:spTgt>
+                                        </p:tgtEl>
+                                        <p:attrNameLst>
+                                          <p:attrName>ppt_x</p:attrName>
+                                        </p:attrNameLst>
+                                      </p:cBhvr>
+                                      <p:tavLst>
+                                        <p:tav tm="0">
+                                          <p:val>
+                                            <p:strVal val="#ppt_x"/>
+                                          </p:val>
+                                        </p:tav>
+                                        <p:tav tm="100000">
+                                          <p:val>
+                                            <p:strVal val="#ppt_x"/>
+                                          </p:val>
+                                        </p:tav>
+                                      </p:tavLst>
+                                    </p:anim>
+                                    <p:anim calcmode="lin" valueType="num">
+                                      <p:cBhvr additive="base">
+                                        <p:cTn id="54" dur="500" fill="hold"/>
+                                        <p:tgtEl>
+                                          <p:spTgt spid="2">
+                                            <p:txEl>
+                                              <p:pRg st="2" end="2"/>
+                                            </p:txEl>
+                                          </p:spTgt>
+                                        </p:tgtEl>
+                                        <p:attrNameLst>
+                                          <p:attrName>ppt_y</p:attrName>
+                                        </p:attrNameLst>
+                                      </p:cBhvr>
+                                      <p:tavLst>
+                                        <p:tav tm="0">
+                                          <p:val>
+                                            <p:strVal val="1+#ppt_h/2"/>
+                                          </p:val>
+                                        </p:tav>
+                                        <p:tav tm="100000">
+                                          <p:val>
+                                            <p:strVal val="#ppt_y"/>
+                                          </p:val>
+                                        </p:tav>
+                                      </p:tavLst>
+                                    </p:anim>
+                                  </p:childTnLst>
+                                </p:cTn>
+                              </p:par>
+                            </p:childTnLst>
+                          </p:cTn>
+                        </p:par>
+                      </p:childTnLst>
+                    </p:cTn>
+                  </p:par>
                 </p:childTnLst>
               </p:cTn>
               <p:prevCondLst>
@@ -14252,6 +15175,7 @@
     <p:bldLst>
       <p:bldP spid="264" grpId="0"/>
       <p:bldP spid="265" grpId="0" build="p"/>
+      <p:bldP spid="2" grpId="0" build="p"/>
     </p:bldLst>
   </p:timing>
 </p:sld>
@@ -30529,6 +31453,673 @@
   <p:cSld>
     <p:spTree>
       <p:nvGrpSpPr>
+        <p:cNvPr id="1" name=""/>
+        <p:cNvGrpSpPr/>
+        <p:nvPr/>
+      </p:nvGrpSpPr>
+      <p:grpSpPr>
+        <a:xfrm>
+          <a:off x="0" y="0"/>
+          <a:ext cx="0" cy="0"/>
+          <a:chOff x="0" y="0"/>
+          <a:chExt cx="0" cy="0"/>
+        </a:xfrm>
+      </p:grpSpPr>
+      <p:sp>
+        <p:nvSpPr>
+          <p:cNvPr id="8" name="Titre 7">
+            <a:extLst>
+              <a:ext uri="{FF2B5EF4-FFF2-40B4-BE49-F238E27FC236}">
+                <a16:creationId xmlns:a16="http://schemas.microsoft.com/office/drawing/2014/main" id="{68A39366-74A9-454C-EEB2-796B10E87E7F}"/>
+              </a:ext>
+            </a:extLst>
+          </p:cNvPr>
+          <p:cNvSpPr>
+            <a:spLocks noGrp="1"/>
+          </p:cNvSpPr>
+          <p:nvPr>
+            <p:ph type="title" idx="6"/>
+          </p:nvPr>
+        </p:nvSpPr>
+        <p:spPr/>
+        <p:txBody>
+          <a:bodyPr/>
+          <a:lstStyle/>
+          <a:p>
+            <a:r>
+              <a:rPr lang="en-US" dirty="0"/>
+              <a:t>Architecture technique</a:t>
+            </a:r>
+          </a:p>
+        </p:txBody>
+      </p:sp>
+      <p:sp>
+        <p:nvSpPr>
+          <p:cNvPr id="25" name="Rounded Rectangle 4">
+            <a:extLst>
+              <a:ext uri="{FF2B5EF4-FFF2-40B4-BE49-F238E27FC236}">
+                <a16:creationId xmlns:a16="http://schemas.microsoft.com/office/drawing/2014/main" id="{ED007D6B-3671-A233-746E-4FFE023BA4E3}"/>
+              </a:ext>
+            </a:extLst>
+          </p:cNvPr>
+          <p:cNvSpPr/>
+          <p:nvPr/>
+        </p:nvSpPr>
+        <p:spPr>
+          <a:xfrm>
+            <a:off x="1611630" y="1220724"/>
+            <a:ext cx="2057400" cy="480060"/>
+          </a:xfrm>
+          <a:prstGeom prst="roundRect">
+            <a:avLst/>
+          </a:prstGeom>
+          <a:solidFill>
+            <a:srgbClr val="585BCC"/>
+          </a:solidFill>
+          <a:ln>
+            <a:noFill/>
+          </a:ln>
+        </p:spPr>
+        <p:style>
+          <a:lnRef idx="1">
+            <a:schemeClr val="accent1"/>
+          </a:lnRef>
+          <a:fillRef idx="3">
+            <a:schemeClr val="accent1"/>
+          </a:fillRef>
+          <a:effectRef idx="2">
+            <a:schemeClr val="accent1"/>
+          </a:effectRef>
+          <a:fontRef idx="minor">
+            <a:schemeClr val="lt1"/>
+          </a:fontRef>
+        </p:style>
+        <p:txBody>
+          <a:bodyPr rtlCol="0" anchor="ctr"/>
+          <a:lstStyle/>
+          <a:p>
+            <a:pPr algn="ctr"/>
+            <a:endParaRPr sz="1050"/>
+          </a:p>
+        </p:txBody>
+      </p:sp>
+      <p:sp>
+        <p:nvSpPr>
+          <p:cNvPr id="26" name="TextBox 5">
+            <a:extLst>
+              <a:ext uri="{FF2B5EF4-FFF2-40B4-BE49-F238E27FC236}">
+                <a16:creationId xmlns:a16="http://schemas.microsoft.com/office/drawing/2014/main" id="{8BA223A4-E713-5D92-902E-F814315D9C85}"/>
+              </a:ext>
+            </a:extLst>
+          </p:cNvPr>
+          <p:cNvSpPr txBox="1"/>
+          <p:nvPr/>
+        </p:nvSpPr>
+        <p:spPr>
+          <a:xfrm>
+            <a:off x="1700784" y="1296162"/>
+            <a:ext cx="1587294" cy="265457"/>
+          </a:xfrm>
+          <a:prstGeom prst="rect">
+            <a:avLst/>
+          </a:prstGeom>
+          <a:noFill/>
+        </p:spPr>
+        <p:txBody>
+          <a:bodyPr wrap="none">
+            <a:spAutoFit/>
+          </a:bodyPr>
+          <a:lstStyle/>
+          <a:p>
+            <a:pPr>
+              <a:defRPr sz="1500" b="1">
+                <a:solidFill>
+                  <a:srgbClr val="FFFFFF"/>
+                </a:solidFill>
+              </a:defRPr>
+            </a:pPr>
+            <a:r>
+              <a:rPr sz="1125"/>
+              <a:t>Frontend — React.js</a:t>
+            </a:r>
+          </a:p>
+        </p:txBody>
+      </p:sp>
+      <p:sp>
+        <p:nvSpPr>
+          <p:cNvPr id="27" name="TextBox 6">
+            <a:extLst>
+              <a:ext uri="{FF2B5EF4-FFF2-40B4-BE49-F238E27FC236}">
+                <a16:creationId xmlns:a16="http://schemas.microsoft.com/office/drawing/2014/main" id="{F41FDD36-E96E-96F0-D759-6FAAB685D4A6}"/>
+              </a:ext>
+            </a:extLst>
+          </p:cNvPr>
+          <p:cNvSpPr txBox="1"/>
+          <p:nvPr/>
+        </p:nvSpPr>
+        <p:spPr>
+          <a:xfrm>
+            <a:off x="3874771" y="1213866"/>
+            <a:ext cx="1250663" cy="369332"/>
+          </a:xfrm>
+          <a:prstGeom prst="rect">
+            <a:avLst/>
+          </a:prstGeom>
+          <a:noFill/>
+        </p:spPr>
+        <p:txBody>
+          <a:bodyPr wrap="none">
+            <a:spAutoFit/>
+          </a:bodyPr>
+          <a:lstStyle/>
+          <a:p>
+            <a:pPr>
+              <a:defRPr sz="1200">
+                <a:solidFill>
+                  <a:srgbClr val="242730"/>
+                </a:solidFill>
+              </a:defRPr>
+            </a:pPr>
+            <a:r>
+              <a:rPr sz="900"/>
+              <a:t>Interface responsive</a:t>
+            </a:r>
+            <a:br>
+              <a:rPr sz="900"/>
+            </a:br>
+            <a:r>
+              <a:rPr sz="900"/>
+              <a:t>React Router • Axios</a:t>
+            </a:r>
+          </a:p>
+        </p:txBody>
+      </p:sp>
+      <p:cxnSp>
+        <p:nvCxnSpPr>
+          <p:cNvPr id="28" name="Connector 7">
+            <a:extLst>
+              <a:ext uri="{FF2B5EF4-FFF2-40B4-BE49-F238E27FC236}">
+                <a16:creationId xmlns:a16="http://schemas.microsoft.com/office/drawing/2014/main" id="{3445C2FC-C75D-BCA6-504C-23E0FD3704FB}"/>
+              </a:ext>
+            </a:extLst>
+          </p:cNvPr>
+          <p:cNvCxnSpPr/>
+          <p:nvPr/>
+        </p:nvCxnSpPr>
+        <p:spPr>
+          <a:xfrm>
+            <a:off x="4560570" y="1885950"/>
+            <a:ext cx="0" cy="288036"/>
+          </a:xfrm>
+          <a:prstGeom prst="line">
+            <a:avLst/>
+          </a:prstGeom>
+          <a:ln w="19050">
+            <a:solidFill>
+              <a:srgbClr val="666973"/>
+            </a:solidFill>
+          </a:ln>
+        </p:spPr>
+        <p:style>
+          <a:lnRef idx="2">
+            <a:schemeClr val="accent1"/>
+          </a:lnRef>
+          <a:fillRef idx="0">
+            <a:schemeClr val="accent1"/>
+          </a:fillRef>
+          <a:effectRef idx="1">
+            <a:schemeClr val="accent1"/>
+          </a:effectRef>
+          <a:fontRef idx="minor">
+            <a:schemeClr val="tx1"/>
+          </a:fontRef>
+        </p:style>
+      </p:cxnSp>
+      <p:sp>
+        <p:nvSpPr>
+          <p:cNvPr id="29" name="Rounded Rectangle 8">
+            <a:extLst>
+              <a:ext uri="{FF2B5EF4-FFF2-40B4-BE49-F238E27FC236}">
+                <a16:creationId xmlns:a16="http://schemas.microsoft.com/office/drawing/2014/main" id="{C35BC55C-7712-5BFC-343D-15EC1826910D}"/>
+              </a:ext>
+            </a:extLst>
+          </p:cNvPr>
+          <p:cNvSpPr/>
+          <p:nvPr/>
+        </p:nvSpPr>
+        <p:spPr>
+          <a:xfrm>
+            <a:off x="1440180" y="2194560"/>
+            <a:ext cx="6240780" cy="822960"/>
+          </a:xfrm>
+          <a:prstGeom prst="roundRect">
+            <a:avLst/>
+          </a:prstGeom>
+          <a:solidFill>
+            <a:srgbClr val="FFFFFF"/>
+          </a:solidFill>
+          <a:ln w="25400">
+            <a:solidFill>
+              <a:srgbClr val="D36799"/>
+            </a:solidFill>
+          </a:ln>
+        </p:spPr>
+        <p:style>
+          <a:lnRef idx="1">
+            <a:schemeClr val="accent1"/>
+          </a:lnRef>
+          <a:fillRef idx="3">
+            <a:schemeClr val="accent1"/>
+          </a:fillRef>
+          <a:effectRef idx="2">
+            <a:schemeClr val="accent1"/>
+          </a:effectRef>
+          <a:fontRef idx="minor">
+            <a:schemeClr val="lt1"/>
+          </a:fontRef>
+        </p:style>
+        <p:txBody>
+          <a:bodyPr rtlCol="0" anchor="ctr"/>
+          <a:lstStyle/>
+          <a:p>
+            <a:pPr algn="ctr"/>
+            <a:endParaRPr sz="1050"/>
+          </a:p>
+        </p:txBody>
+      </p:sp>
+      <p:sp>
+        <p:nvSpPr>
+          <p:cNvPr id="30" name="Rounded Rectangle 9">
+            <a:extLst>
+              <a:ext uri="{FF2B5EF4-FFF2-40B4-BE49-F238E27FC236}">
+                <a16:creationId xmlns:a16="http://schemas.microsoft.com/office/drawing/2014/main" id="{A87B027F-1A90-B85B-204F-727284726C0B}"/>
+              </a:ext>
+            </a:extLst>
+          </p:cNvPr>
+          <p:cNvSpPr/>
+          <p:nvPr/>
+        </p:nvSpPr>
+        <p:spPr>
+          <a:xfrm>
+            <a:off x="1611630" y="2352294"/>
+            <a:ext cx="2057400" cy="480060"/>
+          </a:xfrm>
+          <a:prstGeom prst="roundRect">
+            <a:avLst/>
+          </a:prstGeom>
+          <a:solidFill>
+            <a:srgbClr val="D36799"/>
+          </a:solidFill>
+          <a:ln>
+            <a:noFill/>
+          </a:ln>
+        </p:spPr>
+        <p:style>
+          <a:lnRef idx="1">
+            <a:schemeClr val="accent1"/>
+          </a:lnRef>
+          <a:fillRef idx="3">
+            <a:schemeClr val="accent1"/>
+          </a:fillRef>
+          <a:effectRef idx="2">
+            <a:schemeClr val="accent1"/>
+          </a:effectRef>
+          <a:fontRef idx="minor">
+            <a:schemeClr val="lt1"/>
+          </a:fontRef>
+        </p:style>
+        <p:txBody>
+          <a:bodyPr rtlCol="0" anchor="ctr"/>
+          <a:lstStyle/>
+          <a:p>
+            <a:pPr algn="ctr"/>
+            <a:endParaRPr sz="1050"/>
+          </a:p>
+        </p:txBody>
+      </p:sp>
+      <p:sp>
+        <p:nvSpPr>
+          <p:cNvPr id="31" name="TextBox 10">
+            <a:extLst>
+              <a:ext uri="{FF2B5EF4-FFF2-40B4-BE49-F238E27FC236}">
+                <a16:creationId xmlns:a16="http://schemas.microsoft.com/office/drawing/2014/main" id="{81554DB2-8E78-5193-6736-9655FB783585}"/>
+              </a:ext>
+            </a:extLst>
+          </p:cNvPr>
+          <p:cNvSpPr txBox="1"/>
+          <p:nvPr/>
+        </p:nvSpPr>
+        <p:spPr>
+          <a:xfrm>
+            <a:off x="1700784" y="2427732"/>
+            <a:ext cx="2372765" cy="265457"/>
+          </a:xfrm>
+          <a:prstGeom prst="rect">
+            <a:avLst/>
+          </a:prstGeom>
+          <a:noFill/>
+        </p:spPr>
+        <p:txBody>
+          <a:bodyPr wrap="none">
+            <a:spAutoFit/>
+          </a:bodyPr>
+          <a:lstStyle/>
+          <a:p>
+            <a:pPr>
+              <a:defRPr sz="1500" b="1">
+                <a:solidFill>
+                  <a:srgbClr val="FFFFFF"/>
+                </a:solidFill>
+              </a:defRPr>
+            </a:pPr>
+            <a:r>
+              <a:rPr sz="1125"/>
+              <a:t>Backend — Node.js / Express.js</a:t>
+            </a:r>
+          </a:p>
+        </p:txBody>
+      </p:sp>
+      <p:sp>
+        <p:nvSpPr>
+          <p:cNvPr id="32" name="TextBox 11">
+            <a:extLst>
+              <a:ext uri="{FF2B5EF4-FFF2-40B4-BE49-F238E27FC236}">
+                <a16:creationId xmlns:a16="http://schemas.microsoft.com/office/drawing/2014/main" id="{F02FCF3D-A7C2-A091-6124-30F75A05D5AF}"/>
+              </a:ext>
+            </a:extLst>
+          </p:cNvPr>
+          <p:cNvSpPr txBox="1"/>
+          <p:nvPr/>
+        </p:nvSpPr>
+        <p:spPr>
+          <a:xfrm>
+            <a:off x="3874771" y="2345436"/>
+            <a:ext cx="1643399" cy="369332"/>
+          </a:xfrm>
+          <a:prstGeom prst="rect">
+            <a:avLst/>
+          </a:prstGeom>
+          <a:noFill/>
+        </p:spPr>
+        <p:txBody>
+          <a:bodyPr wrap="none">
+            <a:spAutoFit/>
+          </a:bodyPr>
+          <a:lstStyle/>
+          <a:p>
+            <a:pPr>
+              <a:defRPr sz="1200">
+                <a:solidFill>
+                  <a:srgbClr val="242730"/>
+                </a:solidFill>
+              </a:defRPr>
+            </a:pPr>
+            <a:r>
+              <a:rPr sz="900"/>
+              <a:t>API REST</a:t>
+            </a:r>
+            <a:br>
+              <a:rPr sz="900"/>
+            </a:br>
+            <a:r>
+              <a:rPr sz="900"/>
+              <a:t>Logique métier • JWT • rôles</a:t>
+            </a:r>
+          </a:p>
+        </p:txBody>
+      </p:sp>
+      <p:cxnSp>
+        <p:nvCxnSpPr>
+          <p:cNvPr id="33" name="Connector 12">
+            <a:extLst>
+              <a:ext uri="{FF2B5EF4-FFF2-40B4-BE49-F238E27FC236}">
+                <a16:creationId xmlns:a16="http://schemas.microsoft.com/office/drawing/2014/main" id="{5AC2818C-FF6B-D345-5AFC-C09E8EAF6AEB}"/>
+              </a:ext>
+            </a:extLst>
+          </p:cNvPr>
+          <p:cNvCxnSpPr/>
+          <p:nvPr/>
+        </p:nvCxnSpPr>
+        <p:spPr>
+          <a:xfrm>
+            <a:off x="4560570" y="3017520"/>
+            <a:ext cx="0" cy="288036"/>
+          </a:xfrm>
+          <a:prstGeom prst="line">
+            <a:avLst/>
+          </a:prstGeom>
+          <a:ln w="19050">
+            <a:solidFill>
+              <a:srgbClr val="666973"/>
+            </a:solidFill>
+          </a:ln>
+        </p:spPr>
+        <p:style>
+          <a:lnRef idx="2">
+            <a:schemeClr val="accent1"/>
+          </a:lnRef>
+          <a:fillRef idx="0">
+            <a:schemeClr val="accent1"/>
+          </a:fillRef>
+          <a:effectRef idx="1">
+            <a:schemeClr val="accent1"/>
+          </a:effectRef>
+          <a:fontRef idx="minor">
+            <a:schemeClr val="tx1"/>
+          </a:fontRef>
+        </p:style>
+      </p:cxnSp>
+      <p:sp>
+        <p:nvSpPr>
+          <p:cNvPr id="34" name="Rounded Rectangle 13">
+            <a:extLst>
+              <a:ext uri="{FF2B5EF4-FFF2-40B4-BE49-F238E27FC236}">
+                <a16:creationId xmlns:a16="http://schemas.microsoft.com/office/drawing/2014/main" id="{540F393D-BF1C-870A-5846-F9CC4A9A6C84}"/>
+              </a:ext>
+            </a:extLst>
+          </p:cNvPr>
+          <p:cNvSpPr/>
+          <p:nvPr/>
+        </p:nvSpPr>
+        <p:spPr>
+          <a:xfrm>
+            <a:off x="1440180" y="3326130"/>
+            <a:ext cx="6240780" cy="822960"/>
+          </a:xfrm>
+          <a:prstGeom prst="roundRect">
+            <a:avLst/>
+          </a:prstGeom>
+          <a:solidFill>
+            <a:srgbClr val="FFFFFF"/>
+          </a:solidFill>
+          <a:ln w="25400">
+            <a:solidFill>
+              <a:srgbClr val="A6C989"/>
+            </a:solidFill>
+          </a:ln>
+        </p:spPr>
+        <p:style>
+          <a:lnRef idx="1">
+            <a:schemeClr val="accent1"/>
+          </a:lnRef>
+          <a:fillRef idx="3">
+            <a:schemeClr val="accent1"/>
+          </a:fillRef>
+          <a:effectRef idx="2">
+            <a:schemeClr val="accent1"/>
+          </a:effectRef>
+          <a:fontRef idx="minor">
+            <a:schemeClr val="lt1"/>
+          </a:fontRef>
+        </p:style>
+        <p:txBody>
+          <a:bodyPr rtlCol="0" anchor="ctr"/>
+          <a:lstStyle/>
+          <a:p>
+            <a:pPr algn="ctr"/>
+            <a:endParaRPr sz="1050"/>
+          </a:p>
+        </p:txBody>
+      </p:sp>
+      <p:sp>
+        <p:nvSpPr>
+          <p:cNvPr id="35" name="Rounded Rectangle 14">
+            <a:extLst>
+              <a:ext uri="{FF2B5EF4-FFF2-40B4-BE49-F238E27FC236}">
+                <a16:creationId xmlns:a16="http://schemas.microsoft.com/office/drawing/2014/main" id="{ECB25AF0-3477-833D-A56D-A3ABCFD0C039}"/>
+              </a:ext>
+            </a:extLst>
+          </p:cNvPr>
+          <p:cNvSpPr/>
+          <p:nvPr/>
+        </p:nvSpPr>
+        <p:spPr>
+          <a:xfrm>
+            <a:off x="1611630" y="3483864"/>
+            <a:ext cx="2057400" cy="480060"/>
+          </a:xfrm>
+          <a:prstGeom prst="roundRect">
+            <a:avLst/>
+          </a:prstGeom>
+          <a:solidFill>
+            <a:srgbClr val="A6C989"/>
+          </a:solidFill>
+          <a:ln>
+            <a:noFill/>
+          </a:ln>
+        </p:spPr>
+        <p:style>
+          <a:lnRef idx="1">
+            <a:schemeClr val="accent1"/>
+          </a:lnRef>
+          <a:fillRef idx="3">
+            <a:schemeClr val="accent1"/>
+          </a:fillRef>
+          <a:effectRef idx="2">
+            <a:schemeClr val="accent1"/>
+          </a:effectRef>
+          <a:fontRef idx="minor">
+            <a:schemeClr val="lt1"/>
+          </a:fontRef>
+        </p:style>
+        <p:txBody>
+          <a:bodyPr rtlCol="0" anchor="ctr"/>
+          <a:lstStyle/>
+          <a:p>
+            <a:pPr algn="ctr"/>
+            <a:endParaRPr sz="1050"/>
+          </a:p>
+        </p:txBody>
+      </p:sp>
+      <p:sp>
+        <p:nvSpPr>
+          <p:cNvPr id="36" name="TextBox 15">
+            <a:extLst>
+              <a:ext uri="{FF2B5EF4-FFF2-40B4-BE49-F238E27FC236}">
+                <a16:creationId xmlns:a16="http://schemas.microsoft.com/office/drawing/2014/main" id="{3B75D768-81A8-BEF6-825C-DF82E23CD54F}"/>
+              </a:ext>
+            </a:extLst>
+          </p:cNvPr>
+          <p:cNvSpPr txBox="1"/>
+          <p:nvPr/>
+        </p:nvSpPr>
+        <p:spPr>
+          <a:xfrm>
+            <a:off x="1700784" y="3559302"/>
+            <a:ext cx="1731564" cy="265457"/>
+          </a:xfrm>
+          <a:prstGeom prst="rect">
+            <a:avLst/>
+          </a:prstGeom>
+          <a:noFill/>
+        </p:spPr>
+        <p:txBody>
+          <a:bodyPr wrap="none">
+            <a:spAutoFit/>
+          </a:bodyPr>
+          <a:lstStyle/>
+          <a:p>
+            <a:pPr>
+              <a:defRPr sz="1500" b="1">
+                <a:solidFill>
+                  <a:srgbClr val="FFFFFF"/>
+                </a:solidFill>
+              </a:defRPr>
+            </a:pPr>
+            <a:r>
+              <a:rPr sz="1125"/>
+              <a:t>Database — MongoDB</a:t>
+            </a:r>
+          </a:p>
+        </p:txBody>
+      </p:sp>
+      <p:sp>
+        <p:nvSpPr>
+          <p:cNvPr id="37" name="TextBox 16">
+            <a:extLst>
+              <a:ext uri="{FF2B5EF4-FFF2-40B4-BE49-F238E27FC236}">
+                <a16:creationId xmlns:a16="http://schemas.microsoft.com/office/drawing/2014/main" id="{EDD5A33F-0DAA-87C5-E1CF-A4E2F508C824}"/>
+              </a:ext>
+            </a:extLst>
+          </p:cNvPr>
+          <p:cNvSpPr txBox="1"/>
+          <p:nvPr/>
+        </p:nvSpPr>
+        <p:spPr>
+          <a:xfrm>
+            <a:off x="3874771" y="3477005"/>
+            <a:ext cx="3185487" cy="369332"/>
+          </a:xfrm>
+          <a:prstGeom prst="rect">
+            <a:avLst/>
+          </a:prstGeom>
+          <a:noFill/>
+        </p:spPr>
+        <p:txBody>
+          <a:bodyPr wrap="none">
+            <a:spAutoFit/>
+          </a:bodyPr>
+          <a:lstStyle/>
+          <a:p>
+            <a:pPr>
+              <a:defRPr sz="1200">
+                <a:solidFill>
+                  <a:srgbClr val="242730"/>
+                </a:solidFill>
+              </a:defRPr>
+            </a:pPr>
+            <a:r>
+              <a:rPr sz="900"/>
+              <a:t>Mongoose</a:t>
+            </a:r>
+            <a:br>
+              <a:rPr sz="900"/>
+            </a:br>
+            <a:r>
+              <a:rPr sz="900"/>
+              <a:t>Collections : users, products, categories, orders, payments</a:t>
+            </a:r>
+          </a:p>
+        </p:txBody>
+      </p:sp>
+    </p:spTree>
+    <p:extLst>
+      <p:ext uri="{BB962C8B-B14F-4D97-AF65-F5344CB8AC3E}">
+        <p14:creationId xmlns:p14="http://schemas.microsoft.com/office/powerpoint/2010/main" val="1787411866"/>
+      </p:ext>
+    </p:extLst>
+  </p:cSld>
+  <p:clrMapOvr>
+    <a:masterClrMapping/>
+  </p:clrMapOvr>
+</p:sld>
+</file>
+
+<file path=ppt/slides/slide7.xml><?xml version="1.0" encoding="utf-8"?>
+<p:sld xmlns:a="http://schemas.openxmlformats.org/drawingml/2006/main" xmlns:r="http://schemas.openxmlformats.org/officeDocument/2006/relationships" xmlns:p="http://schemas.openxmlformats.org/presentationml/2006/main">
+  <p:cSld>
+    <p:spTree>
+      <p:nvGrpSpPr>
         <p:cNvPr id="1" name="Shape 2996"/>
         <p:cNvGrpSpPr/>
         <p:nvPr/>
@@ -32447,7 +34038,7 @@
 </p:sld>
 </file>
 
-<file path=ppt/slides/slide7.xml><?xml version="1.0" encoding="utf-8"?>
+<file path=ppt/slides/slide8.xml><?xml version="1.0" encoding="utf-8"?>
 <p:sld xmlns:a="http://schemas.openxmlformats.org/drawingml/2006/main" xmlns:r="http://schemas.openxmlformats.org/officeDocument/2006/relationships" xmlns:p="http://schemas.openxmlformats.org/presentationml/2006/main">
   <p:cSld>
     <p:spTree>

--- a/Food-Delivery.pptx
+++ b/Food-Delivery.pptx
@@ -949,9 +949,324 @@
             </a:r>
             <a:r>
               <a:rPr lang="fr-FR" dirty="0"/>
+              <a:t>,</a:t>
+            </a:r>
+          </a:p>
+          <a:p>
+            <a:pPr marL="0" lvl="0" indent="0" algn="l" rtl="0">
+              <a:spcBef>
+                <a:spcPts val="0"/>
+              </a:spcBef>
+              <a:spcAft>
+                <a:spcPts val="0"/>
+              </a:spcAft>
+              <a:buNone/>
+            </a:pPr>
+            <a:endParaRPr lang="fr-FR" dirty="0"/>
+          </a:p>
+          <a:p>
+            <a:pPr marL="158750" indent="0">
+              <a:buNone/>
+            </a:pPr>
+            <a:r>
+              <a:rPr lang="en-US" dirty="0"/>
+              <a:t>Avant </a:t>
+            </a:r>
+            <a:r>
+              <a:rPr lang="en-US" dirty="0" err="1"/>
+              <a:t>tous</a:t>
+            </a:r>
+            <a:r>
+              <a:rPr lang="en-US" dirty="0"/>
+              <a:t> nous tenons à </a:t>
+            </a:r>
+            <a:r>
+              <a:rPr lang="en-US" dirty="0" err="1"/>
+              <a:t>remercier</a:t>
+            </a:r>
+            <a:r>
+              <a:rPr lang="en-US" dirty="0"/>
+              <a:t> </a:t>
+            </a:r>
+            <a:r>
+              <a:rPr lang="en-US" dirty="0" err="1"/>
+              <a:t>notre</a:t>
+            </a:r>
+            <a:r>
+              <a:rPr lang="en-US" dirty="0"/>
+              <a:t> </a:t>
+            </a:r>
+            <a:r>
+              <a:rPr lang="en-US" dirty="0" err="1"/>
+              <a:t>coordinateur</a:t>
+            </a:r>
+            <a:r>
+              <a:rPr lang="en-US" dirty="0"/>
+              <a:t>, Monsieur le </a:t>
+            </a:r>
+            <a:r>
+              <a:rPr lang="en-US" dirty="0" err="1"/>
+              <a:t>Professeur</a:t>
+            </a:r>
+            <a:r>
+              <a:rPr lang="en-US" dirty="0"/>
+              <a:t> X, </a:t>
+            </a:r>
+            <a:r>
+              <a:rPr lang="en-US" dirty="0" err="1"/>
+              <a:t>ainsi</a:t>
+            </a:r>
+            <a:r>
+              <a:rPr lang="en-US" dirty="0"/>
+              <a:t> </a:t>
+            </a:r>
+            <a:r>
+              <a:rPr lang="en-US" dirty="0" err="1"/>
+              <a:t>que</a:t>
+            </a:r>
+            <a:r>
+              <a:rPr lang="en-US" dirty="0"/>
+              <a:t> Messieurs les </a:t>
+            </a:r>
+            <a:r>
+              <a:rPr lang="en-US" dirty="0" err="1"/>
+              <a:t>membres</a:t>
+            </a:r>
+            <a:r>
+              <a:rPr lang="en-US" dirty="0"/>
+              <a:t> du jury, Monsieur Y et Monsieur Z, pour </a:t>
+            </a:r>
+            <a:r>
+              <a:rPr lang="en-US" dirty="0" err="1"/>
+              <a:t>leur</a:t>
+            </a:r>
+            <a:r>
+              <a:rPr lang="en-US" dirty="0"/>
+              <a:t> </a:t>
+            </a:r>
+            <a:r>
+              <a:rPr lang="en-US" dirty="0" err="1"/>
+              <a:t>présence</a:t>
+            </a:r>
+            <a:r>
+              <a:rPr lang="en-US" dirty="0"/>
               <a:t>, </a:t>
             </a:r>
-            <a:endParaRPr dirty="0"/>
+            <a:r>
+              <a:rPr lang="en-US" dirty="0" err="1"/>
+              <a:t>leur</a:t>
+            </a:r>
+            <a:r>
+              <a:rPr lang="en-US" dirty="0"/>
+              <a:t> </a:t>
+            </a:r>
+            <a:r>
+              <a:rPr lang="en-US" dirty="0" err="1"/>
+              <a:t>disponibilité</a:t>
+            </a:r>
+            <a:r>
+              <a:rPr lang="en-US" dirty="0"/>
+              <a:t> et le temps </a:t>
+            </a:r>
+            <a:r>
+              <a:rPr lang="en-US" dirty="0" err="1"/>
+              <a:t>qu’ils</a:t>
+            </a:r>
+            <a:r>
+              <a:rPr lang="en-US" dirty="0"/>
+              <a:t> nous </a:t>
+            </a:r>
+            <a:r>
+              <a:rPr lang="en-US" dirty="0" err="1"/>
+              <a:t>accordent</a:t>
+            </a:r>
+            <a:r>
+              <a:rPr lang="en-US" dirty="0"/>
+              <a:t> </a:t>
+            </a:r>
+            <a:r>
+              <a:rPr lang="en-US" dirty="0" err="1"/>
+              <a:t>afin</a:t>
+            </a:r>
+            <a:r>
+              <a:rPr lang="en-US" dirty="0"/>
+              <a:t> </a:t>
+            </a:r>
+            <a:r>
+              <a:rPr lang="en-US" dirty="0" err="1"/>
+              <a:t>d’assister</a:t>
+            </a:r>
+            <a:r>
+              <a:rPr lang="en-US" dirty="0"/>
+              <a:t> à la </a:t>
+            </a:r>
+            <a:r>
+              <a:rPr lang="en-US" dirty="0" err="1"/>
+              <a:t>présentation</a:t>
+            </a:r>
+            <a:r>
+              <a:rPr lang="en-US" dirty="0"/>
+              <a:t> de </a:t>
+            </a:r>
+            <a:r>
+              <a:rPr lang="en-US" dirty="0" err="1"/>
+              <a:t>notre</a:t>
+            </a:r>
+            <a:r>
+              <a:rPr lang="en-US" dirty="0"/>
+              <a:t> </a:t>
+            </a:r>
+            <a:r>
+              <a:rPr lang="en-US" dirty="0" err="1"/>
+              <a:t>mémoire</a:t>
+            </a:r>
+            <a:r>
+              <a:rPr lang="en-US" dirty="0"/>
+              <a:t> de fin </a:t>
+            </a:r>
+            <a:r>
+              <a:rPr lang="en-US" dirty="0" err="1"/>
+              <a:t>d’études</a:t>
+            </a:r>
+            <a:r>
+              <a:rPr lang="en-US" dirty="0"/>
+              <a:t>, </a:t>
+            </a:r>
+            <a:r>
+              <a:rPr lang="en-US" dirty="0" err="1"/>
+              <a:t>réalisé</a:t>
+            </a:r>
+            <a:r>
+              <a:rPr lang="en-US" dirty="0"/>
+              <a:t> dans le cadre de </a:t>
+            </a:r>
+            <a:r>
+              <a:rPr lang="en-US" dirty="0" err="1"/>
+              <a:t>l’obtention</a:t>
+            </a:r>
+            <a:r>
+              <a:rPr lang="en-US" dirty="0"/>
+              <a:t> de </a:t>
+            </a:r>
+            <a:r>
+              <a:rPr lang="en-US" dirty="0" err="1"/>
+              <a:t>notre</a:t>
+            </a:r>
+            <a:r>
+              <a:rPr lang="en-US" dirty="0"/>
+              <a:t> diplôme de master.</a:t>
+            </a:r>
+          </a:p>
+          <a:p>
+            <a:pPr marL="158750" marR="0" lvl="0" indent="0" algn="l" defTabSz="914400" rtl="0" eaLnBrk="1" fontAlgn="auto" latinLnBrk="0" hangingPunct="1">
+              <a:lnSpc>
+                <a:spcPct val="100000"/>
+              </a:lnSpc>
+              <a:spcBef>
+                <a:spcPts val="0"/>
+              </a:spcBef>
+              <a:spcAft>
+                <a:spcPts val="0"/>
+              </a:spcAft>
+              <a:buClr>
+                <a:srgbClr val="000000"/>
+              </a:buClr>
+              <a:buSzPts val="1100"/>
+              <a:buFont typeface="Arial"/>
+              <a:buNone/>
+              <a:tabLst/>
+              <a:defRPr/>
+            </a:pPr>
+            <a:r>
+              <a:rPr lang="en-US" dirty="0"/>
+              <a:t>Alors Nous vous </a:t>
+            </a:r>
+            <a:r>
+              <a:rPr lang="en-US" dirty="0" err="1"/>
+              <a:t>présentons</a:t>
+            </a:r>
+            <a:r>
+              <a:rPr lang="en-US" dirty="0"/>
+              <a:t> </a:t>
+            </a:r>
+            <a:r>
+              <a:rPr lang="en-US" dirty="0" err="1"/>
+              <a:t>aujourd’hui</a:t>
+            </a:r>
+            <a:r>
+              <a:rPr lang="en-US" dirty="0"/>
+              <a:t> </a:t>
+            </a:r>
+            <a:r>
+              <a:rPr lang="en-US" dirty="0" err="1"/>
+              <a:t>notre</a:t>
+            </a:r>
+            <a:r>
+              <a:rPr lang="en-US" dirty="0"/>
+              <a:t> </a:t>
+            </a:r>
+            <a:r>
+              <a:rPr lang="en-US" dirty="0" err="1"/>
+              <a:t>projet</a:t>
+            </a:r>
+            <a:r>
+              <a:rPr lang="en-US" dirty="0"/>
+              <a:t> de fin </a:t>
+            </a:r>
+            <a:r>
+              <a:rPr lang="en-US" dirty="0" err="1"/>
+              <a:t>d’études</a:t>
+            </a:r>
+            <a:r>
+              <a:rPr lang="en-US" dirty="0"/>
+              <a:t>, </a:t>
+            </a:r>
+            <a:r>
+              <a:rPr lang="en-US" dirty="0" err="1"/>
+              <a:t>réalisé</a:t>
+            </a:r>
+            <a:r>
+              <a:rPr lang="en-US" dirty="0"/>
+              <a:t> par moi-</a:t>
+            </a:r>
+            <a:r>
+              <a:rPr lang="en-US" dirty="0" err="1"/>
+              <a:t>même</a:t>
+            </a:r>
+            <a:r>
+              <a:rPr lang="en-US" dirty="0"/>
+              <a:t> Azeddine </a:t>
+            </a:r>
+            <a:r>
+              <a:rPr lang="en-US" dirty="0" err="1"/>
+              <a:t>maslouh</a:t>
+            </a:r>
+            <a:r>
+              <a:rPr lang="en-US" dirty="0"/>
+              <a:t> et </a:t>
+            </a:r>
+            <a:r>
+              <a:rPr lang="en-US" dirty="0" err="1"/>
+              <a:t>mon</a:t>
+            </a:r>
+            <a:r>
+              <a:rPr lang="en-US" dirty="0"/>
+              <a:t> </a:t>
+            </a:r>
+            <a:r>
+              <a:rPr lang="en-US" dirty="0" err="1"/>
+              <a:t>camarade</a:t>
+            </a:r>
+            <a:r>
+              <a:rPr lang="en-US" dirty="0"/>
+              <a:t>, Monsieur E.</a:t>
+            </a:r>
+          </a:p>
+          <a:p>
+            <a:pPr marL="158750" indent="0">
+              <a:buNone/>
+            </a:pPr>
+            <a:endParaRPr lang="fr-FR" dirty="0"/>
           </a:p>
         </p:txBody>
       </p:sp>
@@ -5356,7 +5671,7 @@
         <p:fade thruBlk="1"/>
       </p:transition>
     </mc:Choice>
-    <mc:Fallback xmlns:ahyp="http://schemas.microsoft.com/office/drawing/2018/hyperlinkcolor" xmlns:p15="http://schemas.microsoft.com/office/powerpoint/2012/main" xmlns:com="http://schemas.openxmlformats.org/drawingml/2006/compatibility" xmlns:pvml="urn:schemas-microsoft-com:office:powerpoint" xmlns:v="urn:schemas-microsoft-com:vml" xmlns:o="urn:schemas-microsoft-com:office:office" xmlns:dgm="http://schemas.openxmlformats.org/drawingml/2006/diagram" xmlns:c="http://schemas.openxmlformats.org/drawingml/2006/chart" xmlns:mv="urn:schemas-microsoft-com:mac:vml" xmlns="">
+    <mc:Fallback xmlns="" xmlns:mv="urn:schemas-microsoft-com:mac:vml" xmlns:c="http://schemas.openxmlformats.org/drawingml/2006/chart" xmlns:dgm="http://schemas.openxmlformats.org/drawingml/2006/diagram" xmlns:o="urn:schemas-microsoft-com:office:office" xmlns:v="urn:schemas-microsoft-com:vml" xmlns:pvml="urn:schemas-microsoft-com:office:powerpoint" xmlns:com="http://schemas.openxmlformats.org/drawingml/2006/compatibility" xmlns:p15="http://schemas.microsoft.com/office/powerpoint/2012/main" xmlns:ahyp="http://schemas.microsoft.com/office/drawing/2018/hyperlinkcolor">
       <p:transition spd="slow">
         <p:fade/>
       </p:transition>

--- a/Food-Delivery.pptx
+++ b/Food-Delivery.pptx
@@ -30,14 +30,14 @@
       <p:boldItalic r:id="rId16"/>
     </p:embeddedFont>
     <p:embeddedFont>
-      <p:font typeface="Open Sans" panose="020B0606030504020204" pitchFamily="34" charset="0"/>
+      <p:font typeface="Open Sans" panose="020B0604020202020204" charset="0"/>
       <p:regular r:id="rId17"/>
       <p:bold r:id="rId18"/>
       <p:italic r:id="rId19"/>
       <p:boldItalic r:id="rId20"/>
     </p:embeddedFont>
     <p:embeddedFont>
-      <p:font typeface="Roboto" panose="02000000000000000000" pitchFamily="2" charset="0"/>
+      <p:font typeface="Roboto" panose="020B0604020202020204" charset="0"/>
       <p:regular r:id="rId21"/>
       <p:bold r:id="rId22"/>
       <p:italic r:id="rId23"/>
@@ -894,63 +894,33 @@
             </a:pPr>
             <a:r>
               <a:rPr lang="fr-FR" dirty="0"/>
-              <a:t>Bonjour tout le monde, j’espère que vous allez bien. Aujourd’hui, </a:t>
+              <a:t>Bonjour tout le monde, j’espère que vous allez bien. </a:t>
             </a:r>
             <a:r>
-              <a:rPr lang="fr-FR" baseline="0" dirty="0"/>
-              <a:t>on va vous </a:t>
+              <a:rPr lang="fr-FR" b="1" smtClean="0"/>
+              <a:t>Marhaba</a:t>
+            </a:r>
+            <a:r>
+              <a:rPr lang="fr-FR" smtClean="0"/>
+              <a:t>, </a:t>
             </a:r>
             <a:r>
               <a:rPr lang="fr-FR" dirty="0"/>
-              <a:t>présenter </a:t>
+              <a:t>notre application conçue pour offrir une solution simple et efficace </a:t>
             </a:r>
             <a:r>
-              <a:rPr lang="fr-FR" b="1" dirty="0" err="1"/>
-              <a:t>Marhaba</a:t>
+              <a:rPr lang="fr-FR" dirty="0" smtClean="0"/>
+              <a:t>de</a:t>
             </a:r>
             <a:r>
-              <a:rPr lang="fr-FR" dirty="0"/>
-              <a:t>, notre application conçue pour offrir une solution simple et efficace de </a:t>
+              <a:rPr lang="fr-FR" baseline="0" dirty="0" smtClean="0"/>
+              <a:t> livraison de repas</a:t>
             </a:r>
             <a:r>
-              <a:rPr lang="fr-FR" b="1" dirty="0"/>
-              <a:t>livraison de repas</a:t>
-            </a:r>
-            <a:r>
-              <a:rPr lang="fr-FR" dirty="0"/>
+              <a:rPr lang="fr-FR" dirty="0" smtClean="0"/>
               <a:t>.</a:t>
             </a:r>
-            <a:br>
-              <a:rPr lang="fr-FR" dirty="0"/>
-            </a:br>
-            <a:r>
-              <a:rPr lang="fr-FR" dirty="0"/>
-              <a:t>Ce projet a été réalisé dans le cadre de notre PFE par moi </a:t>
-            </a:r>
-            <a:r>
-              <a:rPr lang="fr-FR" dirty="0" err="1"/>
-              <a:t>méme</a:t>
-            </a:r>
-            <a:r>
-              <a:rPr lang="fr-FR" dirty="0"/>
-              <a:t> </a:t>
-            </a:r>
-            <a:r>
-              <a:rPr lang="fr-FR" b="1" dirty="0"/>
-              <a:t>Azeddine</a:t>
-            </a:r>
-            <a:r>
-              <a:rPr lang="fr-FR" dirty="0"/>
-              <a:t> et mon collègue </a:t>
-            </a:r>
-            <a:r>
-              <a:rPr lang="fr-FR" b="1" dirty="0"/>
-              <a:t>Zakaria</a:t>
-            </a:r>
-            <a:r>
-              <a:rPr lang="fr-FR" dirty="0"/>
-              <a:t>,</a:t>
-            </a:r>
+            <a:endParaRPr lang="fr-FR" dirty="0"/>
           </a:p>
           <a:p>
             <a:pPr marL="0" lvl="0" indent="0" algn="l" rtl="0">
@@ -1018,15 +988,7 @@
             </a:r>
             <a:r>
               <a:rPr lang="en-US" dirty="0"/>
-              <a:t> </a:t>
-            </a:r>
-            <a:r>
-              <a:rPr lang="en-US" dirty="0" err="1"/>
-              <a:t>que</a:t>
-            </a:r>
-            <a:r>
-              <a:rPr lang="en-US" dirty="0"/>
-              <a:t> Messieurs les </a:t>
+              <a:t> que Messieurs les </a:t>
             </a:r>
             <a:r>
               <a:rPr lang="en-US" dirty="0" err="1"/>
@@ -1129,8 +1091,8 @@
               <a:t>d’études</a:t>
             </a:r>
             <a:r>
-              <a:rPr lang="en-US" dirty="0"/>
-              <a:t>, </a:t>
+              <a:rPr lang="en-US" dirty="0" smtClean="0"/>
+              <a:t>,   </a:t>
             </a:r>
             <a:r>
               <a:rPr lang="en-US" dirty="0" err="1"/>
@@ -1178,15 +1140,43 @@
               <a:defRPr/>
             </a:pPr>
             <a:r>
+              <a:rPr lang="en-US" dirty="0" err="1"/>
+              <a:t>Alors</a:t>
+            </a:r>
+            <a:r>
               <a:rPr lang="en-US" dirty="0"/>
-              <a:t>Alors Nous vous </a:t>
+              <a:t> </a:t>
+            </a:r>
+            <a:r>
+              <a:rPr lang="en-US" dirty="0" smtClean="0"/>
+              <a:t>On</a:t>
+            </a:r>
+            <a:r>
+              <a:rPr lang="en-US" baseline="0" dirty="0" smtClean="0"/>
+              <a:t> </a:t>
+            </a:r>
+            <a:r>
+              <a:rPr lang="en-US" baseline="0" dirty="0" err="1" smtClean="0"/>
+              <a:t>va</a:t>
+            </a:r>
+            <a:r>
+              <a:rPr lang="en-US" dirty="0" smtClean="0"/>
+              <a:t> </a:t>
             </a:r>
             <a:r>
               <a:rPr lang="en-US" dirty="0" err="1"/>
-              <a:t>présentons</a:t>
+              <a:t>vous</a:t>
             </a:r>
             <a:r>
               <a:rPr lang="en-US" dirty="0"/>
+              <a:t> </a:t>
+            </a:r>
+            <a:r>
+              <a:rPr lang="en-US" dirty="0" err="1" smtClean="0"/>
+              <a:t>présente</a:t>
+            </a:r>
+            <a:r>
+              <a:rPr lang="en-US" dirty="0" smtClean="0"/>
               <a:t> </a:t>
             </a:r>
             <a:r>
@@ -1227,11 +1217,11 @@
             </a:r>
             <a:r>
               <a:rPr lang="en-US" dirty="0"/>
-              <a:t> par moi-</a:t>
+              <a:t> par </a:t>
             </a:r>
             <a:r>
               <a:rPr lang="en-US" dirty="0" err="1"/>
-              <a:t>même</a:t>
+              <a:t>moi-même</a:t>
             </a:r>
             <a:r>
               <a:rPr lang="en-US" dirty="0"/>
@@ -1243,15 +1233,7 @@
             </a:r>
             <a:r>
               <a:rPr lang="en-US" dirty="0"/>
-              <a:t> et </a:t>
-            </a:r>
-            <a:r>
-              <a:rPr lang="en-US" dirty="0" err="1"/>
-              <a:t>mon</a:t>
-            </a:r>
-            <a:r>
-              <a:rPr lang="en-US" dirty="0"/>
-              <a:t> </a:t>
+              <a:t> et mon </a:t>
             </a:r>
             <a:r>
               <a:rPr lang="en-US" dirty="0" err="1"/>
@@ -14659,7 +14641,7 @@
         <p:spPr>
           <a:xfrm>
             <a:off x="0" y="4399470"/>
-            <a:ext cx="4233600" cy="307777"/>
+            <a:ext cx="4760184" cy="307777"/>
           </a:xfrm>
           <a:prstGeom prst="rect">
             <a:avLst/>
@@ -37983,6 +37965,10 @@
             <a:r>
               <a:rPr lang="fr-FR" dirty="0"/>
               <a:t>, appel à l’API</a:t>
+            </a:r>
+            <a:r>
+              <a:rPr dirty="0"/>
+              <a:t/>
             </a:r>
             <a:br>
               <a:rPr dirty="0"/>
